--- a/Chaucer_Integration_Pattern_Diagrams_Editable.pptx
+++ b/Chaucer_Integration_Pattern_Diagrams_Editable.pptx
@@ -28,7 +28,6 @@
     <p:sldId id="276" r:id="rId27"/>
     <p:sldId id="277" r:id="rId28"/>
     <p:sldId id="278" r:id="rId29"/>
-    <p:sldId id="279" r:id="rId30"/>
     <p:sldId id="280" r:id="rId31"/>
     <p:sldId id="281" r:id="rId32"/>
     <p:sldId id="282" r:id="rId33"/>
@@ -12740,7 +12739,53 @@
       <p:grpSpPr/>
       <p:sp>
         <p:nvSpPr>
-          <p:cNvPr id="2" name="TextBox 1"/>
+          <p:cNvPr id="2" name="Rounded Rectangle 1"/>
+          <p:cNvSpPr/>
+          <p:nvPr/>
+        </p:nvSpPr>
+        <p:spPr>
+          <a:xfrm>
+            <a:off x="411480" y="1188720"/>
+            <a:ext cx="11365992" cy="4800600"/>
+          </a:xfrm>
+          <a:prstGeom prst="roundRect">
+            <a:avLst>
+              <a:gd name="adj" fmla="val 1500"/>
+            </a:avLst>
+          </a:prstGeom>
+          <a:noFill/>
+          <a:ln w="12700">
+            <a:solidFill>
+              <a:srgbClr val="D8DCE2"/>
+            </a:solidFill>
+          </a:ln>
+          <a:effectLst/>
+        </p:spPr>
+        <p:style>
+          <a:lnRef idx="1">
+            <a:schemeClr val="accent1"/>
+          </a:lnRef>
+          <a:fillRef idx="3">
+            <a:schemeClr val="accent1"/>
+          </a:fillRef>
+          <a:effectRef idx="2">
+            <a:schemeClr val="accent1"/>
+          </a:effectRef>
+          <a:fontRef idx="minor">
+            <a:schemeClr val="lt1"/>
+          </a:fontRef>
+        </p:style>
+        <p:txBody>
+          <a:bodyPr rtlCol="0" anchor="ctr"/>
+          <a:lstStyle/>
+          <a:p>
+            <a:pPr algn="ctr"/>
+          </a:p>
+        </p:txBody>
+      </p:sp>
+      <p:sp>
+        <p:nvSpPr>
+          <p:cNvPr id="3" name="TextBox 2"/>
           <p:cNvSpPr txBox="1"/>
           <p:nvPr/>
         </p:nvSpPr>
@@ -12771,60 +12816,14 @@
               <a:t>SFDEINT1</a:t>
             </a:r>
             <a:r>
-              <a:rPr b="0" sz="2000">
+              <a:rPr sz="2000">
                 <a:solidFill>
                   <a:srgbClr val="55606E"/>
                 </a:solidFill>
                 <a:latin typeface="Aptos"/>
               </a:rPr>
-              <a:t>   Streaming ingestion (Function + Snowpipe Streaming API)</a:t>
-            </a:r>
-          </a:p>
-        </p:txBody>
-      </p:sp>
-      <p:sp>
-        <p:nvSpPr>
-          <p:cNvPr id="3" name="Rounded Rectangle 2"/>
-          <p:cNvSpPr/>
-          <p:nvPr/>
-        </p:nvSpPr>
-        <p:spPr>
-          <a:xfrm>
-            <a:off x="411480" y="1188720"/>
-            <a:ext cx="11365992" cy="4800600"/>
-          </a:xfrm>
-          <a:prstGeom prst="roundRect">
-            <a:avLst>
-              <a:gd name="adj" fmla="val 2000"/>
-            </a:avLst>
-          </a:prstGeom>
-          <a:noFill/>
-          <a:ln w="12700">
-            <a:solidFill>
-              <a:srgbClr val="D8DCE2"/>
-            </a:solidFill>
-          </a:ln>
-          <a:effectLst/>
-        </p:spPr>
-        <p:style>
-          <a:lnRef idx="1">
-            <a:schemeClr val="accent1"/>
-          </a:lnRef>
-          <a:fillRef idx="3">
-            <a:schemeClr val="accent1"/>
-          </a:fillRef>
-          <a:effectRef idx="2">
-            <a:schemeClr val="accent1"/>
-          </a:effectRef>
-          <a:fontRef idx="minor">
-            <a:schemeClr val="lt1"/>
-          </a:fontRef>
-        </p:style>
-        <p:txBody>
-          <a:bodyPr rtlCol="0" anchor="ctr"/>
-          <a:lstStyle/>
-          <a:p>
-            <a:pPr algn="ctr"/>
+              <a:t>   Streaming ingestion (Function or Kafka)</a:t>
+            </a:r>
           </a:p>
         </p:txBody>
       </p:sp>
@@ -12836,8 +12835,8 @@
         </p:nvSpPr>
         <p:spPr>
           <a:xfrm>
-            <a:off x="1169289" y="3163824"/>
-            <a:ext cx="1874519" cy="896112"/>
+            <a:off x="868680" y="3108960"/>
+            <a:ext cx="1828800" cy="914400"/>
           </a:xfrm>
           <a:prstGeom prst="roundRect">
             <a:avLst>
@@ -12909,8 +12908,8 @@
         </p:nvSpPr>
         <p:spPr>
           <a:xfrm>
-            <a:off x="3827906" y="3163824"/>
-            <a:ext cx="1874519" cy="896112"/>
+            <a:off x="3429000" y="2240280"/>
+            <a:ext cx="1920240" cy="914400"/>
           </a:xfrm>
           <a:prstGeom prst="roundRect">
             <a:avLst>
@@ -12982,8 +12981,8 @@
         </p:nvSpPr>
         <p:spPr>
           <a:xfrm>
-            <a:off x="6486525" y="3163824"/>
-            <a:ext cx="1874519" cy="896112"/>
+            <a:off x="6903720" y="4343400"/>
+            <a:ext cx="1783080" cy="914400"/>
           </a:xfrm>
           <a:prstGeom prst="roundRect">
             <a:avLst>
@@ -13026,7 +13025,7 @@
                 </a:solidFill>
                 <a:latin typeface="Aptos"/>
               </a:rPr>
-              <a:t>Snowpipe</a:t>
+              <a:t>Kafka</a:t>
             </a:r>
           </a:p>
           <a:p>
@@ -13042,24 +13041,26 @@
                 </a:solidFill>
                 <a:latin typeface="Aptos"/>
               </a:rPr>
-              <a:t>Streaming API</a:t>
-            </a:r>
-          </a:p>
-        </p:txBody>
-      </p:sp>
-      <p:sp>
-        <p:nvSpPr>
-          <p:cNvPr id="7" name="Can 6"/>
+              <a:t>topic</a:t>
+            </a:r>
+          </a:p>
+        </p:txBody>
+      </p:sp>
+      <p:sp>
+        <p:nvSpPr>
+          <p:cNvPr id="7" name="Rounded Rectangle 6"/>
           <p:cNvSpPr/>
           <p:nvPr/>
         </p:nvSpPr>
         <p:spPr>
           <a:xfrm>
-            <a:off x="9145143" y="3163824"/>
-            <a:ext cx="1874519" cy="896112"/>
-          </a:xfrm>
-          <a:prstGeom prst="can">
-            <a:avLst/>
+            <a:off x="9281160" y="2880360"/>
+            <a:ext cx="2240280" cy="1234440"/>
+          </a:xfrm>
+          <a:prstGeom prst="roundRect">
+            <a:avLst>
+              <a:gd name="adj" fmla="val 9000"/>
+            </a:avLst>
           </a:prstGeom>
           <a:solidFill>
             <a:srgbClr val="E4EEF9"/>
@@ -13097,23 +13098,7 @@
                 </a:solidFill>
                 <a:latin typeface="Aptos"/>
               </a:rPr>
-              <a:t>Snowflake</a:t>
-            </a:r>
-          </a:p>
-          <a:p>
-            <a:pPr algn="ctr">
-              <a:spcBef>
-                <a:spcPts val="200"/>
-              </a:spcBef>
-            </a:pPr>
-            <a:r>
-              <a:rPr sz="850">
-                <a:solidFill>
-                  <a:srgbClr val="1F3864"/>
-                </a:solidFill>
-                <a:latin typeface="Aptos"/>
-              </a:rPr>
-              <a:t>raw schema</a:t>
+              <a:t>Data platform</a:t>
             </a:r>
           </a:p>
         </p:txBody>
@@ -13125,9 +13110,9 @@
           <p:nvPr/>
         </p:nvCxnSpPr>
         <p:spPr>
-          <a:xfrm>
-            <a:off x="3043809" y="3611880"/>
-            <a:ext cx="784097" cy="0"/>
+          <a:xfrm flipV="1">
+            <a:off x="2697480" y="2697480"/>
+            <a:ext cx="731520" cy="822960"/>
           </a:xfrm>
           <a:prstGeom prst="line">
             <a:avLst/>
@@ -13163,8 +13148,152 @@
         </p:nvCxnSpPr>
         <p:spPr>
           <a:xfrm>
-            <a:off x="5702426" y="3611880"/>
-            <a:ext cx="784099" cy="0"/>
+            <a:off x="5349240" y="2697480"/>
+            <a:ext cx="3931920" cy="571500"/>
+          </a:xfrm>
+          <a:prstGeom prst="line">
+            <a:avLst/>
+          </a:prstGeom>
+          <a:ln w="22225">
+            <a:solidFill>
+              <a:srgbClr val="5A6472"/>
+            </a:solidFill>
+            <a:tailEnd type="triangle" w="med" len="med"/>
+          </a:ln>
+          <a:effectLst/>
+        </p:spPr>
+        <p:style>
+          <a:lnRef idx="2">
+            <a:schemeClr val="accent1"/>
+          </a:lnRef>
+          <a:fillRef idx="0">
+            <a:schemeClr val="accent1"/>
+          </a:fillRef>
+          <a:effectRef idx="1">
+            <a:schemeClr val="accent1"/>
+          </a:effectRef>
+          <a:fontRef idx="minor">
+            <a:schemeClr val="tx1"/>
+          </a:fontRef>
+        </p:style>
+      </p:cxnSp>
+      <p:sp>
+        <p:nvSpPr>
+          <p:cNvPr id="10" name="TextBox 9"/>
+          <p:cNvSpPr txBox="1"/>
+          <p:nvPr/>
+        </p:nvSpPr>
+        <p:spPr>
+          <a:xfrm>
+            <a:off x="6446520" y="2672334"/>
+            <a:ext cx="1737360" cy="237744"/>
+          </a:xfrm>
+          <a:prstGeom prst="rect">
+            <a:avLst/>
+          </a:prstGeom>
+          <a:noFill/>
+        </p:spPr>
+        <p:txBody>
+          <a:bodyPr wrap="none" lIns="0" rIns="0" tIns="0" bIns="0">
+            <a:spAutoFit/>
+          </a:bodyPr>
+          <a:lstStyle/>
+          <a:p>
+            <a:pPr algn="ctr"/>
+            <a:r>
+              <a:rPr sz="900">
+                <a:solidFill>
+                  <a:srgbClr val="444B55"/>
+                </a:solidFill>
+                <a:latin typeface="Aptos"/>
+              </a:rPr>
+              <a:t>stream</a:t>
+            </a:r>
+          </a:p>
+        </p:txBody>
+      </p:sp>
+      <p:cxnSp>
+        <p:nvCxnSpPr>
+          <p:cNvPr id="11" name="Connector 10"/>
+          <p:cNvCxnSpPr/>
+          <p:nvPr/>
+        </p:nvCxnSpPr>
+        <p:spPr>
+          <a:xfrm>
+            <a:off x="2697480" y="3703320"/>
+            <a:ext cx="4206240" cy="1097280"/>
+          </a:xfrm>
+          <a:prstGeom prst="line">
+            <a:avLst/>
+          </a:prstGeom>
+          <a:ln w="22225">
+            <a:solidFill>
+              <a:srgbClr val="5A6472"/>
+            </a:solidFill>
+            <a:tailEnd type="triangle" w="med" len="med"/>
+          </a:ln>
+          <a:effectLst/>
+        </p:spPr>
+        <p:style>
+          <a:lnRef idx="2">
+            <a:schemeClr val="accent1"/>
+          </a:lnRef>
+          <a:fillRef idx="0">
+            <a:schemeClr val="accent1"/>
+          </a:fillRef>
+          <a:effectRef idx="1">
+            <a:schemeClr val="accent1"/>
+          </a:effectRef>
+          <a:fontRef idx="minor">
+            <a:schemeClr val="tx1"/>
+          </a:fontRef>
+        </p:style>
+      </p:cxnSp>
+      <p:sp>
+        <p:nvSpPr>
+          <p:cNvPr id="12" name="TextBox 11"/>
+          <p:cNvSpPr txBox="1"/>
+          <p:nvPr/>
+        </p:nvSpPr>
+        <p:spPr>
+          <a:xfrm>
+            <a:off x="3931920" y="4343400"/>
+            <a:ext cx="1737360" cy="237744"/>
+          </a:xfrm>
+          <a:prstGeom prst="rect">
+            <a:avLst/>
+          </a:prstGeom>
+          <a:noFill/>
+        </p:spPr>
+        <p:txBody>
+          <a:bodyPr wrap="none" lIns="0" rIns="0" tIns="0" bIns="0">
+            <a:spAutoFit/>
+          </a:bodyPr>
+          <a:lstStyle/>
+          <a:p>
+            <a:pPr algn="ctr"/>
+            <a:r>
+              <a:rPr sz="900">
+                <a:solidFill>
+                  <a:srgbClr val="444B55"/>
+                </a:solidFill>
+                <a:latin typeface="Aptos"/>
+              </a:rPr>
+              <a:t>publish</a:t>
+            </a:r>
+          </a:p>
+        </p:txBody>
+      </p:sp>
+      <p:cxnSp>
+        <p:nvCxnSpPr>
+          <p:cNvPr id="13" name="Connector 12"/>
+          <p:cNvCxnSpPr/>
+          <p:nvPr/>
+        </p:nvCxnSpPr>
+        <p:spPr>
+          <a:xfrm flipV="1">
+            <a:off x="8686800" y="3817620"/>
+            <a:ext cx="594360" cy="982980"/>
           </a:xfrm>
           <a:prstGeom prst="line">
             <a:avLst/>
@@ -13194,23 +13323,23 @@
       </p:cxnSp>
       <p:cxnSp>
         <p:nvCxnSpPr>
-          <p:cNvPr id="10" name="Connector 9"/>
+          <p:cNvPr id="14" name="Connector 13"/>
           <p:cNvCxnSpPr/>
           <p:nvPr/>
         </p:nvCxnSpPr>
         <p:spPr>
           <a:xfrm>
-            <a:off x="8361045" y="3611880"/>
-            <a:ext cx="784098" cy="0"/>
+            <a:off x="6355080" y="1481328"/>
+            <a:ext cx="0" cy="4279392"/>
           </a:xfrm>
           <a:prstGeom prst="line">
             <a:avLst/>
           </a:prstGeom>
-          <a:ln w="22225">
-            <a:solidFill>
-              <a:srgbClr val="5A6472"/>
-            </a:solidFill>
-            <a:tailEnd type="triangle" w="med" len="med"/>
+          <a:ln w="28575">
+            <a:solidFill>
+              <a:srgbClr val="B0453B"/>
+            </a:solidFill>
+            <a:prstDash val="dash"/>
           </a:ln>
           <a:effectLst/>
         </p:spPr>
@@ -13229,6 +13358,111 @@
           </a:fontRef>
         </p:style>
       </p:cxnSp>
+      <p:sp>
+        <p:nvSpPr>
+          <p:cNvPr id="15" name="TextBox 14"/>
+          <p:cNvSpPr txBox="1"/>
+          <p:nvPr/>
+        </p:nvSpPr>
+        <p:spPr>
+          <a:xfrm>
+            <a:off x="4892040" y="1261872"/>
+            <a:ext cx="2926080" cy="237744"/>
+          </a:xfrm>
+          <a:prstGeom prst="rect">
+            <a:avLst/>
+          </a:prstGeom>
+          <a:noFill/>
+        </p:spPr>
+        <p:txBody>
+          <a:bodyPr wrap="none">
+            <a:spAutoFit/>
+          </a:bodyPr>
+          <a:lstStyle/>
+          <a:p>
+            <a:pPr algn="ctr"/>
+            <a:r>
+              <a:rPr sz="950" b="1" i="1">
+                <a:solidFill>
+                  <a:srgbClr val="B0453B"/>
+                </a:solidFill>
+                <a:latin typeface="Aptos"/>
+              </a:rPr>
+              <a:t>Data handoff boundary</a:t>
+            </a:r>
+          </a:p>
+        </p:txBody>
+      </p:sp>
+      <p:sp>
+        <p:nvSpPr>
+          <p:cNvPr id="16" name="TextBox 15"/>
+          <p:cNvSpPr txBox="1"/>
+          <p:nvPr/>
+        </p:nvSpPr>
+        <p:spPr>
+          <a:xfrm>
+            <a:off x="1645920" y="5504688"/>
+            <a:ext cx="3657600" cy="256032"/>
+          </a:xfrm>
+          <a:prstGeom prst="rect">
+            <a:avLst/>
+          </a:prstGeom>
+          <a:noFill/>
+        </p:spPr>
+        <p:txBody>
+          <a:bodyPr wrap="none">
+            <a:spAutoFit/>
+          </a:bodyPr>
+          <a:lstStyle/>
+          <a:p>
+            <a:pPr algn="ctr"/>
+            <a:r>
+              <a:rPr sz="1000" i="1">
+                <a:solidFill>
+                  <a:srgbClr val="6B7280"/>
+                </a:solidFill>
+                <a:latin typeface="Aptos"/>
+              </a:rPr>
+              <a:t>Integration team</a:t>
+            </a:r>
+          </a:p>
+        </p:txBody>
+      </p:sp>
+      <p:sp>
+        <p:nvSpPr>
+          <p:cNvPr id="17" name="TextBox 16"/>
+          <p:cNvSpPr txBox="1"/>
+          <p:nvPr/>
+        </p:nvSpPr>
+        <p:spPr>
+          <a:xfrm>
+            <a:off x="7146036" y="5504688"/>
+            <a:ext cx="3657600" cy="256032"/>
+          </a:xfrm>
+          <a:prstGeom prst="rect">
+            <a:avLst/>
+          </a:prstGeom>
+          <a:noFill/>
+        </p:spPr>
+        <p:txBody>
+          <a:bodyPr wrap="none">
+            <a:spAutoFit/>
+          </a:bodyPr>
+          <a:lstStyle/>
+          <a:p>
+            <a:pPr algn="ctr"/>
+            <a:r>
+              <a:rPr sz="1000" i="1">
+                <a:solidFill>
+                  <a:srgbClr val="6B7280"/>
+                </a:solidFill>
+                <a:latin typeface="Aptos"/>
+              </a:rPr>
+              <a:t>Data platform team</a:t>
+            </a:r>
+          </a:p>
+        </p:txBody>
+      </p:sp>
     </p:spTree>
   </p:cSld>
   <p:clrMapOvr>
@@ -13758,7 +13992,53 @@
       <p:grpSpPr/>
       <p:sp>
         <p:nvSpPr>
-          <p:cNvPr id="2" name="TextBox 1"/>
+          <p:cNvPr id="2" name="Rounded Rectangle 1"/>
+          <p:cNvSpPr/>
+          <p:nvPr/>
+        </p:nvSpPr>
+        <p:spPr>
+          <a:xfrm>
+            <a:off x="411480" y="1188720"/>
+            <a:ext cx="11365992" cy="4800600"/>
+          </a:xfrm>
+          <a:prstGeom prst="roundRect">
+            <a:avLst>
+              <a:gd name="adj" fmla="val 1500"/>
+            </a:avLst>
+          </a:prstGeom>
+          <a:noFill/>
+          <a:ln w="12700">
+            <a:solidFill>
+              <a:srgbClr val="D8DCE2"/>
+            </a:solidFill>
+          </a:ln>
+          <a:effectLst/>
+        </p:spPr>
+        <p:style>
+          <a:lnRef idx="1">
+            <a:schemeClr val="accent1"/>
+          </a:lnRef>
+          <a:fillRef idx="3">
+            <a:schemeClr val="accent1"/>
+          </a:fillRef>
+          <a:effectRef idx="2">
+            <a:schemeClr val="accent1"/>
+          </a:effectRef>
+          <a:fontRef idx="minor">
+            <a:schemeClr val="lt1"/>
+          </a:fontRef>
+        </p:style>
+        <p:txBody>
+          <a:bodyPr rtlCol="0" anchor="ctr"/>
+          <a:lstStyle/>
+          <a:p>
+            <a:pPr algn="ctr"/>
+          </a:p>
+        </p:txBody>
+      </p:sp>
+      <p:sp>
+        <p:nvSpPr>
+          <p:cNvPr id="3" name="TextBox 2"/>
           <p:cNvSpPr txBox="1"/>
           <p:nvPr/>
         </p:nvSpPr>
@@ -13789,60 +14069,14 @@
               <a:t>SFDEINT3</a:t>
             </a:r>
             <a:r>
-              <a:rPr b="0" sz="2000">
+              <a:rPr sz="2000">
                 <a:solidFill>
                   <a:srgbClr val="55606E"/>
                 </a:solidFill>
                 <a:latin typeface="Aptos"/>
               </a:rPr>
-              <a:t>   File ingestion (Snowpipe auto-ingest)</a:t>
-            </a:r>
-          </a:p>
-        </p:txBody>
-      </p:sp>
-      <p:sp>
-        <p:nvSpPr>
-          <p:cNvPr id="3" name="Rounded Rectangle 2"/>
-          <p:cNvSpPr/>
-          <p:nvPr/>
-        </p:nvSpPr>
-        <p:spPr>
-          <a:xfrm>
-            <a:off x="411480" y="1188720"/>
-            <a:ext cx="11365992" cy="4800600"/>
-          </a:xfrm>
-          <a:prstGeom prst="roundRect">
-            <a:avLst>
-              <a:gd name="adj" fmla="val 2000"/>
-            </a:avLst>
-          </a:prstGeom>
-          <a:noFill/>
-          <a:ln w="12700">
-            <a:solidFill>
-              <a:srgbClr val="D8DCE2"/>
-            </a:solidFill>
-          </a:ln>
-          <a:effectLst/>
-        </p:spPr>
-        <p:style>
-          <a:lnRef idx="1">
-            <a:schemeClr val="accent1"/>
-          </a:lnRef>
-          <a:fillRef idx="3">
-            <a:schemeClr val="accent1"/>
-          </a:fillRef>
-          <a:effectRef idx="2">
-            <a:schemeClr val="accent1"/>
-          </a:effectRef>
-          <a:fontRef idx="minor">
-            <a:schemeClr val="lt1"/>
-          </a:fontRef>
-        </p:style>
-        <p:txBody>
-          <a:bodyPr rtlCol="0" anchor="ctr"/>
-          <a:lstStyle/>
-          <a:p>
-            <a:pPr algn="ctr"/>
+              <a:t>   File ingestion (landing to data platform)</a:t>
+            </a:r>
           </a:p>
         </p:txBody>
       </p:sp>
@@ -13854,8 +14088,8 @@
         </p:nvSpPr>
         <p:spPr>
           <a:xfrm>
-            <a:off x="1005839" y="3163824"/>
-            <a:ext cx="1669694" cy="896112"/>
+            <a:off x="1234440" y="3108960"/>
+            <a:ext cx="1920240" cy="914400"/>
           </a:xfrm>
           <a:prstGeom prst="roundRect">
             <a:avLst>
@@ -13927,8 +14161,8 @@
         </p:nvSpPr>
         <p:spPr>
           <a:xfrm>
-            <a:off x="3132734" y="3163824"/>
-            <a:ext cx="1669694" cy="896112"/>
+            <a:off x="4617720" y="3108960"/>
+            <a:ext cx="2103120" cy="914400"/>
           </a:xfrm>
           <a:prstGeom prst="roundRect">
             <a:avLst>
@@ -14000,8 +14234,8 @@
         </p:nvSpPr>
         <p:spPr>
           <a:xfrm>
-            <a:off x="5259628" y="3163824"/>
-            <a:ext cx="1669694" cy="896112"/>
+            <a:off x="8869680" y="2971800"/>
+            <a:ext cx="2286000" cy="1188720"/>
           </a:xfrm>
           <a:prstGeom prst="roundRect">
             <a:avLst>
@@ -14009,150 +14243,6 @@
             </a:avLst>
           </a:prstGeom>
           <a:solidFill>
-            <a:srgbClr val="D9EFE6"/>
-          </a:solidFill>
-          <a:ln w="19050">
-            <a:solidFill>
-              <a:srgbClr val="2E8B72"/>
-            </a:solidFill>
-          </a:ln>
-          <a:effectLst/>
-        </p:spPr>
-        <p:style>
-          <a:lnRef idx="1">
-            <a:schemeClr val="accent1"/>
-          </a:lnRef>
-          <a:fillRef idx="3">
-            <a:schemeClr val="accent1"/>
-          </a:fillRef>
-          <a:effectRef idx="2">
-            <a:schemeClr val="accent1"/>
-          </a:effectRef>
-          <a:fontRef idx="minor">
-            <a:schemeClr val="lt1"/>
-          </a:fontRef>
-        </p:style>
-        <p:txBody>
-          <a:bodyPr rtlCol="0" anchor="ctr" wrap="square" lIns="38100" rIns="38100" tIns="12700" bIns="12700"/>
-          <a:lstStyle/>
-          <a:p>
-            <a:pPr algn="ctr"/>
-            <a:r>
-              <a:rPr b="1" sz="1250">
-                <a:solidFill>
-                  <a:srgbClr val="1D5B49"/>
-                </a:solidFill>
-                <a:latin typeface="Aptos"/>
-              </a:rPr>
-              <a:t>Event Grid</a:t>
-            </a:r>
-          </a:p>
-          <a:p>
-            <a:pPr algn="ctr">
-              <a:spcBef>
-                <a:spcPts val="200"/>
-              </a:spcBef>
-            </a:pPr>
-            <a:r>
-              <a:rPr sz="850">
-                <a:solidFill>
-                  <a:srgbClr val="1D5B49"/>
-                </a:solidFill>
-                <a:latin typeface="Aptos"/>
-              </a:rPr>
-              <a:t>BlobCreated</a:t>
-            </a:r>
-          </a:p>
-        </p:txBody>
-      </p:sp>
-      <p:sp>
-        <p:nvSpPr>
-          <p:cNvPr id="7" name="Rounded Rectangle 6"/>
-          <p:cNvSpPr/>
-          <p:nvPr/>
-        </p:nvSpPr>
-        <p:spPr>
-          <a:xfrm>
-            <a:off x="7386523" y="3163824"/>
-            <a:ext cx="1669694" cy="896112"/>
-          </a:xfrm>
-          <a:prstGeom prst="roundRect">
-            <a:avLst>
-              <a:gd name="adj" fmla="val 9000"/>
-            </a:avLst>
-          </a:prstGeom>
-          <a:solidFill>
-            <a:srgbClr val="D9EFE6"/>
-          </a:solidFill>
-          <a:ln w="19050">
-            <a:solidFill>
-              <a:srgbClr val="2E8B72"/>
-            </a:solidFill>
-          </a:ln>
-          <a:effectLst/>
-        </p:spPr>
-        <p:style>
-          <a:lnRef idx="1">
-            <a:schemeClr val="accent1"/>
-          </a:lnRef>
-          <a:fillRef idx="3">
-            <a:schemeClr val="accent1"/>
-          </a:fillRef>
-          <a:effectRef idx="2">
-            <a:schemeClr val="accent1"/>
-          </a:effectRef>
-          <a:fontRef idx="minor">
-            <a:schemeClr val="lt1"/>
-          </a:fontRef>
-        </p:style>
-        <p:txBody>
-          <a:bodyPr rtlCol="0" anchor="ctr" wrap="square" lIns="38100" rIns="38100" tIns="12700" bIns="12700"/>
-          <a:lstStyle/>
-          <a:p>
-            <a:pPr algn="ctr"/>
-            <a:r>
-              <a:rPr b="1" sz="1250">
-                <a:solidFill>
-                  <a:srgbClr val="1D5B49"/>
-                </a:solidFill>
-                <a:latin typeface="Aptos"/>
-              </a:rPr>
-              <a:t>Snowpipe</a:t>
-            </a:r>
-          </a:p>
-          <a:p>
-            <a:pPr algn="ctr">
-              <a:spcBef>
-                <a:spcPts val="200"/>
-              </a:spcBef>
-            </a:pPr>
-            <a:r>
-              <a:rPr sz="850">
-                <a:solidFill>
-                  <a:srgbClr val="1D5B49"/>
-                </a:solidFill>
-                <a:latin typeface="Aptos"/>
-              </a:rPr>
-              <a:t>COPY INTO</a:t>
-            </a:r>
-          </a:p>
-        </p:txBody>
-      </p:sp>
-      <p:sp>
-        <p:nvSpPr>
-          <p:cNvPr id="8" name="Can 7"/>
-          <p:cNvSpPr/>
-          <p:nvPr/>
-        </p:nvSpPr>
-        <p:spPr>
-          <a:xfrm>
-            <a:off x="9513417" y="3163824"/>
-            <a:ext cx="1669694" cy="896112"/>
-          </a:xfrm>
-          <a:prstGeom prst="can">
-            <a:avLst/>
-          </a:prstGeom>
-          <a:solidFill>
             <a:srgbClr val="E4EEF9"/>
           </a:solidFill>
           <a:ln w="19050">
@@ -14188,37 +14278,21 @@
                 </a:solidFill>
                 <a:latin typeface="Aptos"/>
               </a:rPr>
-              <a:t>Snowflake</a:t>
-            </a:r>
-          </a:p>
-          <a:p>
-            <a:pPr algn="ctr">
-              <a:spcBef>
-                <a:spcPts val="200"/>
-              </a:spcBef>
-            </a:pPr>
-            <a:r>
-              <a:rPr sz="850">
-                <a:solidFill>
-                  <a:srgbClr val="1F3864"/>
-                </a:solidFill>
-                <a:latin typeface="Aptos"/>
-              </a:rPr>
-              <a:t>raw schema</a:t>
+              <a:t>Data platform</a:t>
             </a:r>
           </a:p>
         </p:txBody>
       </p:sp>
       <p:cxnSp>
         <p:nvCxnSpPr>
-          <p:cNvPr id="9" name="Connector 8"/>
+          <p:cNvPr id="7" name="Connector 6"/>
           <p:cNvCxnSpPr/>
           <p:nvPr/>
         </p:nvCxnSpPr>
         <p:spPr>
           <a:xfrm>
-            <a:off x="2675534" y="3611880"/>
-            <a:ext cx="457200" cy="0"/>
+            <a:off x="3154680" y="3566160"/>
+            <a:ext cx="1463040" cy="0"/>
           </a:xfrm>
           <a:prstGeom prst="line">
             <a:avLst/>
@@ -14246,6 +14320,78 @@
           </a:fontRef>
         </p:style>
       </p:cxnSp>
+      <p:cxnSp>
+        <p:nvCxnSpPr>
+          <p:cNvPr id="8" name="Connector 7"/>
+          <p:cNvCxnSpPr/>
+          <p:nvPr/>
+        </p:nvCxnSpPr>
+        <p:spPr>
+          <a:xfrm>
+            <a:off x="6720840" y="3566160"/>
+            <a:ext cx="2148840" cy="0"/>
+          </a:xfrm>
+          <a:prstGeom prst="line">
+            <a:avLst/>
+          </a:prstGeom>
+          <a:ln w="22225">
+            <a:solidFill>
+              <a:srgbClr val="5A6472"/>
+            </a:solidFill>
+            <a:tailEnd type="triangle" w="med" len="med"/>
+          </a:ln>
+          <a:effectLst/>
+        </p:spPr>
+        <p:style>
+          <a:lnRef idx="2">
+            <a:schemeClr val="accent1"/>
+          </a:lnRef>
+          <a:fillRef idx="0">
+            <a:schemeClr val="accent1"/>
+          </a:fillRef>
+          <a:effectRef idx="1">
+            <a:schemeClr val="accent1"/>
+          </a:effectRef>
+          <a:fontRef idx="minor">
+            <a:schemeClr val="tx1"/>
+          </a:fontRef>
+        </p:style>
+      </p:cxnSp>
+      <p:sp>
+        <p:nvSpPr>
+          <p:cNvPr id="9" name="TextBox 8"/>
+          <p:cNvSpPr txBox="1"/>
+          <p:nvPr/>
+        </p:nvSpPr>
+        <p:spPr>
+          <a:xfrm>
+            <a:off x="6926579" y="3236976"/>
+            <a:ext cx="1737360" cy="237744"/>
+          </a:xfrm>
+          <a:prstGeom prst="rect">
+            <a:avLst/>
+          </a:prstGeom>
+          <a:noFill/>
+        </p:spPr>
+        <p:txBody>
+          <a:bodyPr wrap="none" lIns="0" rIns="0" tIns="0" bIns="0">
+            <a:spAutoFit/>
+          </a:bodyPr>
+          <a:lstStyle/>
+          <a:p>
+            <a:pPr algn="ctr"/>
+            <a:r>
+              <a:rPr sz="900">
+                <a:solidFill>
+                  <a:srgbClr val="444B55"/>
+                </a:solidFill>
+                <a:latin typeface="Aptos"/>
+              </a:rPr>
+              <a:t>auto-ingest</a:t>
+            </a:r>
+          </a:p>
+        </p:txBody>
+      </p:sp>
       <p:cxnSp>
         <p:nvCxnSpPr>
           <p:cNvPr id="10" name="Connector 9"/>
@@ -14254,17 +14400,17 @@
         </p:nvCxnSpPr>
         <p:spPr>
           <a:xfrm>
-            <a:off x="4802428" y="3611880"/>
-            <a:ext cx="457200" cy="0"/>
+            <a:off x="5669279" y="1481328"/>
+            <a:ext cx="0" cy="4279392"/>
           </a:xfrm>
           <a:prstGeom prst="line">
             <a:avLst/>
           </a:prstGeom>
-          <a:ln w="22225">
-            <a:solidFill>
-              <a:srgbClr val="5A6472"/>
-            </a:solidFill>
-            <a:tailEnd type="triangle" w="med" len="med"/>
+          <a:ln w="28575">
+            <a:solidFill>
+              <a:srgbClr val="B0453B"/>
+            </a:solidFill>
+            <a:prstDash val="dash"/>
           </a:ln>
           <a:effectLst/>
         </p:spPr>
@@ -14291,8 +14437,8 @@
         </p:nvSpPr>
         <p:spPr>
           <a:xfrm>
-            <a:off x="4208068" y="3282696"/>
-            <a:ext cx="1645920" cy="237744"/>
+            <a:off x="4206240" y="1261872"/>
+            <a:ext cx="2926080" cy="237744"/>
           </a:xfrm>
           <a:prstGeom prst="rect">
             <a:avLst/>
@@ -14300,61 +14446,59 @@
           <a:noFill/>
         </p:spPr>
         <p:txBody>
-          <a:bodyPr wrap="none" lIns="0" rIns="0" tIns="0" bIns="0">
+          <a:bodyPr wrap="none">
             <a:spAutoFit/>
           </a:bodyPr>
           <a:lstStyle/>
           <a:p>
             <a:pPr algn="ctr"/>
             <a:r>
-              <a:rPr sz="900">
-                <a:solidFill>
-                  <a:srgbClr val="444B55"/>
-                </a:solidFill>
-                <a:latin typeface="Aptos"/>
-              </a:rPr>
-              <a:t>notify</a:t>
-            </a:r>
-          </a:p>
-        </p:txBody>
-      </p:sp>
-      <p:cxnSp>
-        <p:nvCxnSpPr>
-          <p:cNvPr id="12" name="Connector 11"/>
-          <p:cNvCxnSpPr/>
-          <p:nvPr/>
-        </p:nvCxnSpPr>
-        <p:spPr>
-          <a:xfrm>
-            <a:off x="6929323" y="3611880"/>
-            <a:ext cx="457200" cy="0"/>
-          </a:xfrm>
-          <a:prstGeom prst="line">
-            <a:avLst/>
-          </a:prstGeom>
-          <a:ln w="22225">
-            <a:solidFill>
-              <a:srgbClr val="5A6472"/>
-            </a:solidFill>
-            <a:tailEnd type="triangle" w="med" len="med"/>
-          </a:ln>
-          <a:effectLst/>
-        </p:spPr>
-        <p:style>
-          <a:lnRef idx="2">
-            <a:schemeClr val="accent1"/>
-          </a:lnRef>
-          <a:fillRef idx="0">
-            <a:schemeClr val="accent1"/>
-          </a:fillRef>
-          <a:effectRef idx="1">
-            <a:schemeClr val="accent1"/>
-          </a:effectRef>
-          <a:fontRef idx="minor">
-            <a:schemeClr val="tx1"/>
-          </a:fontRef>
-        </p:style>
-      </p:cxnSp>
+              <a:rPr sz="950" b="1" i="1">
+                <a:solidFill>
+                  <a:srgbClr val="B0453B"/>
+                </a:solidFill>
+                <a:latin typeface="Aptos"/>
+              </a:rPr>
+              <a:t>Data handoff boundary</a:t>
+            </a:r>
+          </a:p>
+        </p:txBody>
+      </p:sp>
+      <p:sp>
+        <p:nvSpPr>
+          <p:cNvPr id="12" name="TextBox 11"/>
+          <p:cNvSpPr txBox="1"/>
+          <p:nvPr/>
+        </p:nvSpPr>
+        <p:spPr>
+          <a:xfrm>
+            <a:off x="1303019" y="5504688"/>
+            <a:ext cx="3657600" cy="256032"/>
+          </a:xfrm>
+          <a:prstGeom prst="rect">
+            <a:avLst/>
+          </a:prstGeom>
+          <a:noFill/>
+        </p:spPr>
+        <p:txBody>
+          <a:bodyPr wrap="none">
+            <a:spAutoFit/>
+          </a:bodyPr>
+          <a:lstStyle/>
+          <a:p>
+            <a:pPr algn="ctr"/>
+            <a:r>
+              <a:rPr sz="1000" i="1">
+                <a:solidFill>
+                  <a:srgbClr val="6B7280"/>
+                </a:solidFill>
+                <a:latin typeface="Aptos"/>
+              </a:rPr>
+              <a:t>Integration team</a:t>
+            </a:r>
+          </a:p>
+        </p:txBody>
+      </p:sp>
       <p:sp>
         <p:nvSpPr>
           <p:cNvPr id="13" name="TextBox 12"/>
@@ -14363,8 +14507,8 @@
         </p:nvSpPr>
         <p:spPr>
           <a:xfrm>
-            <a:off x="6334963" y="3282696"/>
-            <a:ext cx="1645920" cy="237744"/>
+            <a:off x="6803136" y="5504688"/>
+            <a:ext cx="3657600" cy="256032"/>
           </a:xfrm>
           <a:prstGeom prst="rect">
             <a:avLst/>
@@ -14372,92 +14516,20 @@
           <a:noFill/>
         </p:spPr>
         <p:txBody>
-          <a:bodyPr wrap="none" lIns="0" rIns="0" tIns="0" bIns="0">
+          <a:bodyPr wrap="none">
             <a:spAutoFit/>
           </a:bodyPr>
           <a:lstStyle/>
           <a:p>
             <a:pPr algn="ctr"/>
             <a:r>
-              <a:rPr sz="900">
-                <a:solidFill>
-                  <a:srgbClr val="444B55"/>
-                </a:solidFill>
-                <a:latin typeface="Aptos"/>
-              </a:rPr>
-              <a:t>trigger</a:t>
-            </a:r>
-          </a:p>
-        </p:txBody>
-      </p:sp>
-      <p:cxnSp>
-        <p:nvCxnSpPr>
-          <p:cNvPr id="14" name="Connector 13"/>
-          <p:cNvCxnSpPr/>
-          <p:nvPr/>
-        </p:nvCxnSpPr>
-        <p:spPr>
-          <a:xfrm>
-            <a:off x="9056217" y="3611880"/>
-            <a:ext cx="457200" cy="0"/>
-          </a:xfrm>
-          <a:prstGeom prst="line">
-            <a:avLst/>
-          </a:prstGeom>
-          <a:ln w="22225">
-            <a:solidFill>
-              <a:srgbClr val="5A6472"/>
-            </a:solidFill>
-            <a:tailEnd type="triangle" w="med" len="med"/>
-          </a:ln>
-          <a:effectLst/>
-        </p:spPr>
-        <p:style>
-          <a:lnRef idx="2">
-            <a:schemeClr val="accent1"/>
-          </a:lnRef>
-          <a:fillRef idx="0">
-            <a:schemeClr val="accent1"/>
-          </a:fillRef>
-          <a:effectRef idx="1">
-            <a:schemeClr val="accent1"/>
-          </a:effectRef>
-          <a:fontRef idx="minor">
-            <a:schemeClr val="tx1"/>
-          </a:fontRef>
-        </p:style>
-      </p:cxnSp>
-      <p:sp>
-        <p:nvSpPr>
-          <p:cNvPr id="15" name="TextBox 14"/>
-          <p:cNvSpPr txBox="1"/>
-          <p:nvPr/>
-        </p:nvSpPr>
-        <p:spPr>
-          <a:xfrm>
-            <a:off x="8461857" y="3282696"/>
-            <a:ext cx="1645920" cy="237744"/>
-          </a:xfrm>
-          <a:prstGeom prst="rect">
-            <a:avLst/>
-          </a:prstGeom>
-          <a:noFill/>
-        </p:spPr>
-        <p:txBody>
-          <a:bodyPr wrap="none" lIns="0" rIns="0" tIns="0" bIns="0">
-            <a:spAutoFit/>
-          </a:bodyPr>
-          <a:lstStyle/>
-          <a:p>
-            <a:pPr algn="ctr"/>
-            <a:r>
-              <a:rPr sz="900">
-                <a:solidFill>
-                  <a:srgbClr val="444B55"/>
-                </a:solidFill>
-                <a:latin typeface="Aptos"/>
-              </a:rPr>
-              <a:t>load</a:t>
+              <a:rPr sz="1000" i="1">
+                <a:solidFill>
+                  <a:srgbClr val="6B7280"/>
+                </a:solidFill>
+                <a:latin typeface="Aptos"/>
+              </a:rPr>
+              <a:t>Data platform team</a:t>
             </a:r>
           </a:p>
         </p:txBody>
@@ -14482,7 +14554,53 @@
       <p:grpSpPr/>
       <p:sp>
         <p:nvSpPr>
-          <p:cNvPr id="2" name="TextBox 1"/>
+          <p:cNvPr id="2" name="Rounded Rectangle 1"/>
+          <p:cNvSpPr/>
+          <p:nvPr/>
+        </p:nvSpPr>
+        <p:spPr>
+          <a:xfrm>
+            <a:off x="411480" y="1188720"/>
+            <a:ext cx="11365992" cy="4800600"/>
+          </a:xfrm>
+          <a:prstGeom prst="roundRect">
+            <a:avLst>
+              <a:gd name="adj" fmla="val 1500"/>
+            </a:avLst>
+          </a:prstGeom>
+          <a:noFill/>
+          <a:ln w="12700">
+            <a:solidFill>
+              <a:srgbClr val="D8DCE2"/>
+            </a:solidFill>
+          </a:ln>
+          <a:effectLst/>
+        </p:spPr>
+        <p:style>
+          <a:lnRef idx="1">
+            <a:schemeClr val="accent1"/>
+          </a:lnRef>
+          <a:fillRef idx="3">
+            <a:schemeClr val="accent1"/>
+          </a:fillRef>
+          <a:effectRef idx="2">
+            <a:schemeClr val="accent1"/>
+          </a:effectRef>
+          <a:fontRef idx="minor">
+            <a:schemeClr val="lt1"/>
+          </a:fontRef>
+        </p:style>
+        <p:txBody>
+          <a:bodyPr rtlCol="0" anchor="ctr"/>
+          <a:lstStyle/>
+          <a:p>
+            <a:pPr algn="ctr"/>
+          </a:p>
+        </p:txBody>
+      </p:sp>
+      <p:sp>
+        <p:nvSpPr>
+          <p:cNvPr id="3" name="TextBox 2"/>
           <p:cNvSpPr txBox="1"/>
           <p:nvPr/>
         </p:nvSpPr>
@@ -14513,7 +14631,7 @@
               <a:t>SFDEINT4</a:t>
             </a:r>
             <a:r>
-              <a:rPr b="0" sz="2000">
+              <a:rPr sz="2000">
                 <a:solidFill>
                   <a:srgbClr val="55606E"/>
                 </a:solidFill>
@@ -14521,52 +14639,6 @@
               </a:rPr>
               <a:t>   Scheduled batch: CDC / watermark</a:t>
             </a:r>
-          </a:p>
-        </p:txBody>
-      </p:sp>
-      <p:sp>
-        <p:nvSpPr>
-          <p:cNvPr id="3" name="Rounded Rectangle 2"/>
-          <p:cNvSpPr/>
-          <p:nvPr/>
-        </p:nvSpPr>
-        <p:spPr>
-          <a:xfrm>
-            <a:off x="411480" y="1188720"/>
-            <a:ext cx="11365992" cy="4800600"/>
-          </a:xfrm>
-          <a:prstGeom prst="roundRect">
-            <a:avLst>
-              <a:gd name="adj" fmla="val 2000"/>
-            </a:avLst>
-          </a:prstGeom>
-          <a:noFill/>
-          <a:ln w="12700">
-            <a:solidFill>
-              <a:srgbClr val="D8DCE2"/>
-            </a:solidFill>
-          </a:ln>
-          <a:effectLst/>
-        </p:spPr>
-        <p:style>
-          <a:lnRef idx="1">
-            <a:schemeClr val="accent1"/>
-          </a:lnRef>
-          <a:fillRef idx="3">
-            <a:schemeClr val="accent1"/>
-          </a:fillRef>
-          <a:effectRef idx="2">
-            <a:schemeClr val="accent1"/>
-          </a:effectRef>
-          <a:fontRef idx="minor">
-            <a:schemeClr val="lt1"/>
-          </a:fontRef>
-        </p:style>
-        <p:txBody>
-          <a:bodyPr rtlCol="0" anchor="ctr"/>
-          <a:lstStyle/>
-          <a:p>
-            <a:pPr algn="ctr"/>
           </a:p>
         </p:txBody>
       </p:sp>
@@ -14578,8 +14650,8 @@
         </p:nvSpPr>
         <p:spPr>
           <a:xfrm>
-            <a:off x="1005839" y="3163824"/>
-            <a:ext cx="1669694" cy="896112"/>
+            <a:off x="868680" y="3108960"/>
+            <a:ext cx="1783080" cy="914400"/>
           </a:xfrm>
           <a:prstGeom prst="roundRect">
             <a:avLst>
@@ -14651,8 +14723,8 @@
         </p:nvSpPr>
         <p:spPr>
           <a:xfrm>
-            <a:off x="3132734" y="3163824"/>
-            <a:ext cx="1669694" cy="896112"/>
+            <a:off x="3154680" y="3108960"/>
+            <a:ext cx="1965960" cy="914400"/>
           </a:xfrm>
           <a:prstGeom prst="roundRect">
             <a:avLst>
@@ -14724,8 +14796,8 @@
         </p:nvSpPr>
         <p:spPr>
           <a:xfrm>
-            <a:off x="5259628" y="3163824"/>
-            <a:ext cx="1669694" cy="896112"/>
+            <a:off x="5715000" y="3108960"/>
+            <a:ext cx="1920240" cy="914400"/>
           </a:xfrm>
           <a:prstGeom prst="roundRect">
             <a:avLst>
@@ -14797,8 +14869,8 @@
         </p:nvSpPr>
         <p:spPr>
           <a:xfrm>
-            <a:off x="7386523" y="3163824"/>
-            <a:ext cx="1669694" cy="896112"/>
+            <a:off x="8915400" y="2971800"/>
+            <a:ext cx="2240280" cy="1188720"/>
           </a:xfrm>
           <a:prstGeom prst="roundRect">
             <a:avLst>
@@ -14806,77 +14878,6 @@
             </a:avLst>
           </a:prstGeom>
           <a:solidFill>
-            <a:srgbClr val="D9EFE6"/>
-          </a:solidFill>
-          <a:ln w="19050">
-            <a:solidFill>
-              <a:srgbClr val="2E8B72"/>
-            </a:solidFill>
-          </a:ln>
-          <a:effectLst/>
-        </p:spPr>
-        <p:style>
-          <a:lnRef idx="1">
-            <a:schemeClr val="accent1"/>
-          </a:lnRef>
-          <a:fillRef idx="3">
-            <a:schemeClr val="accent1"/>
-          </a:fillRef>
-          <a:effectRef idx="2">
-            <a:schemeClr val="accent1"/>
-          </a:effectRef>
-          <a:fontRef idx="minor">
-            <a:schemeClr val="lt1"/>
-          </a:fontRef>
-        </p:style>
-        <p:txBody>
-          <a:bodyPr rtlCol="0" anchor="ctr" wrap="square" lIns="38100" rIns="38100" tIns="12700" bIns="12700"/>
-          <a:lstStyle/>
-          <a:p>
-            <a:pPr algn="ctr"/>
-            <a:r>
-              <a:rPr b="1" sz="1250">
-                <a:solidFill>
-                  <a:srgbClr val="1D5B49"/>
-                </a:solidFill>
-                <a:latin typeface="Aptos"/>
-              </a:rPr>
-              <a:t>COPY INTO / Snowpipe</a:t>
-            </a:r>
-          </a:p>
-          <a:p>
-            <a:pPr algn="ctr">
-              <a:spcBef>
-                <a:spcPts val="200"/>
-              </a:spcBef>
-            </a:pPr>
-            <a:r>
-              <a:rPr sz="850">
-                <a:solidFill>
-                  <a:srgbClr val="1D5B49"/>
-                </a:solidFill>
-                <a:latin typeface="Aptos"/>
-              </a:rPr>
-              <a:t>bulk load</a:t>
-            </a:r>
-          </a:p>
-        </p:txBody>
-      </p:sp>
-      <p:sp>
-        <p:nvSpPr>
-          <p:cNvPr id="8" name="Can 7"/>
-          <p:cNvSpPr/>
-          <p:nvPr/>
-        </p:nvSpPr>
-        <p:spPr>
-          <a:xfrm>
-            <a:off x="9513417" y="3163824"/>
-            <a:ext cx="1669694" cy="896112"/>
-          </a:xfrm>
-          <a:prstGeom prst="can">
-            <a:avLst/>
-          </a:prstGeom>
-          <a:solidFill>
             <a:srgbClr val="E4EEF9"/>
           </a:solidFill>
           <a:ln w="19050">
@@ -14912,37 +14913,21 @@
                 </a:solidFill>
                 <a:latin typeface="Aptos"/>
               </a:rPr>
-              <a:t>Snowflake</a:t>
-            </a:r>
-          </a:p>
-          <a:p>
-            <a:pPr algn="ctr">
-              <a:spcBef>
-                <a:spcPts val="200"/>
-              </a:spcBef>
-            </a:pPr>
-            <a:r>
-              <a:rPr sz="850">
-                <a:solidFill>
-                  <a:srgbClr val="1F3864"/>
-                </a:solidFill>
-                <a:latin typeface="Aptos"/>
-              </a:rPr>
-              <a:t>raw schema</a:t>
+              <a:t>Data platform</a:t>
             </a:r>
           </a:p>
         </p:txBody>
       </p:sp>
       <p:cxnSp>
         <p:nvCxnSpPr>
-          <p:cNvPr id="9" name="Connector 8"/>
+          <p:cNvPr id="8" name="Connector 7"/>
           <p:cNvCxnSpPr/>
           <p:nvPr/>
         </p:nvCxnSpPr>
         <p:spPr>
           <a:xfrm>
-            <a:off x="2675534" y="3611880"/>
-            <a:ext cx="457200" cy="0"/>
+            <a:off x="2651760" y="3566160"/>
+            <a:ext cx="502920" cy="0"/>
           </a:xfrm>
           <a:prstGeom prst="line">
             <a:avLst/>
@@ -14972,14 +14957,14 @@
       </p:cxnSp>
       <p:sp>
         <p:nvSpPr>
-          <p:cNvPr id="10" name="TextBox 9"/>
+          <p:cNvPr id="9" name="TextBox 8"/>
           <p:cNvSpPr txBox="1"/>
           <p:nvPr/>
         </p:nvSpPr>
         <p:spPr>
           <a:xfrm>
-            <a:off x="2081174" y="3282696"/>
-            <a:ext cx="1645920" cy="237744"/>
+            <a:off x="2034539" y="3236976"/>
+            <a:ext cx="1737360" cy="237744"/>
           </a:xfrm>
           <a:prstGeom prst="rect">
             <a:avLst/>
@@ -15007,14 +14992,14 @@
       </p:sp>
       <p:cxnSp>
         <p:nvCxnSpPr>
-          <p:cNvPr id="11" name="Connector 10"/>
+          <p:cNvPr id="10" name="Connector 9"/>
           <p:cNvCxnSpPr/>
           <p:nvPr/>
         </p:nvCxnSpPr>
         <p:spPr>
           <a:xfrm>
-            <a:off x="4802428" y="3611880"/>
-            <a:ext cx="457200" cy="0"/>
+            <a:off x="5120640" y="3566160"/>
+            <a:ext cx="594360" cy="0"/>
           </a:xfrm>
           <a:prstGeom prst="line">
             <a:avLst/>
@@ -15044,14 +15029,14 @@
       </p:cxnSp>
       <p:sp>
         <p:nvSpPr>
-          <p:cNvPr id="12" name="TextBox 11"/>
+          <p:cNvPr id="11" name="TextBox 10"/>
           <p:cNvSpPr txBox="1"/>
           <p:nvPr/>
         </p:nvSpPr>
         <p:spPr>
           <a:xfrm>
-            <a:off x="4208068" y="3282696"/>
-            <a:ext cx="1645920" cy="237744"/>
+            <a:off x="4549140" y="3236976"/>
+            <a:ext cx="1737360" cy="237744"/>
           </a:xfrm>
           <a:prstGeom prst="rect">
             <a:avLst/>
@@ -15079,14 +15064,14 @@
       </p:sp>
       <p:cxnSp>
         <p:nvCxnSpPr>
-          <p:cNvPr id="13" name="Connector 12"/>
+          <p:cNvPr id="12" name="Connector 11"/>
           <p:cNvCxnSpPr/>
           <p:nvPr/>
         </p:nvCxnSpPr>
         <p:spPr>
           <a:xfrm>
-            <a:off x="6929323" y="3611880"/>
-            <a:ext cx="457200" cy="0"/>
+            <a:off x="7635240" y="3566160"/>
+            <a:ext cx="1280160" cy="0"/>
           </a:xfrm>
           <a:prstGeom prst="line">
             <a:avLst/>
@@ -15116,14 +15101,14 @@
       </p:cxnSp>
       <p:sp>
         <p:nvSpPr>
-          <p:cNvPr id="14" name="TextBox 13"/>
+          <p:cNvPr id="13" name="TextBox 12"/>
           <p:cNvSpPr txBox="1"/>
           <p:nvPr/>
         </p:nvSpPr>
         <p:spPr>
           <a:xfrm>
-            <a:off x="6334963" y="3282696"/>
-            <a:ext cx="1645920" cy="237744"/>
+            <a:off x="7406640" y="3236976"/>
+            <a:ext cx="1737360" cy="237744"/>
           </a:xfrm>
           <a:prstGeom prst="rect">
             <a:avLst/>
@@ -15151,23 +15136,23 @@
       </p:sp>
       <p:cxnSp>
         <p:nvCxnSpPr>
-          <p:cNvPr id="15" name="Connector 14"/>
+          <p:cNvPr id="14" name="Connector 13"/>
           <p:cNvCxnSpPr/>
           <p:nvPr/>
         </p:nvCxnSpPr>
         <p:spPr>
           <a:xfrm>
-            <a:off x="9056217" y="3611880"/>
-            <a:ext cx="457200" cy="0"/>
+            <a:off x="6675120" y="1481328"/>
+            <a:ext cx="0" cy="4279392"/>
           </a:xfrm>
           <a:prstGeom prst="line">
             <a:avLst/>
           </a:prstGeom>
-          <a:ln w="22225">
-            <a:solidFill>
-              <a:srgbClr val="5A6472"/>
-            </a:solidFill>
-            <a:tailEnd type="triangle" w="med" len="med"/>
+          <a:ln w="28575">
+            <a:solidFill>
+              <a:srgbClr val="B0453B"/>
+            </a:solidFill>
+            <a:prstDash val="dash"/>
           </a:ln>
           <a:effectLst/>
         </p:spPr>
@@ -15186,6 +15171,41 @@
           </a:fontRef>
         </p:style>
       </p:cxnSp>
+      <p:sp>
+        <p:nvSpPr>
+          <p:cNvPr id="15" name="TextBox 14"/>
+          <p:cNvSpPr txBox="1"/>
+          <p:nvPr/>
+        </p:nvSpPr>
+        <p:spPr>
+          <a:xfrm>
+            <a:off x="5212079" y="1261872"/>
+            <a:ext cx="2926080" cy="237744"/>
+          </a:xfrm>
+          <a:prstGeom prst="rect">
+            <a:avLst/>
+          </a:prstGeom>
+          <a:noFill/>
+        </p:spPr>
+        <p:txBody>
+          <a:bodyPr wrap="none">
+            <a:spAutoFit/>
+          </a:bodyPr>
+          <a:lstStyle/>
+          <a:p>
+            <a:pPr algn="ctr"/>
+            <a:r>
+              <a:rPr sz="950" b="1" i="1">
+                <a:solidFill>
+                  <a:srgbClr val="B0453B"/>
+                </a:solidFill>
+                <a:latin typeface="Aptos"/>
+              </a:rPr>
+              <a:t>Data handoff boundary</a:t>
+            </a:r>
+          </a:p>
+        </p:txBody>
+      </p:sp>
       <p:sp>
         <p:nvSpPr>
           <p:cNvPr id="16" name="TextBox 15"/>
@@ -15194,8 +15214,8 @@
         </p:nvSpPr>
         <p:spPr>
           <a:xfrm>
-            <a:off x="640080" y="6053328"/>
-            <a:ext cx="10881360" cy="548640"/>
+            <a:off x="1805940" y="5504688"/>
+            <a:ext cx="3657600" cy="256032"/>
           </a:xfrm>
           <a:prstGeom prst="rect">
             <a:avLst/>
@@ -15203,20 +15223,55 @@
           <a:noFill/>
         </p:spPr>
         <p:txBody>
-          <a:bodyPr wrap="square">
+          <a:bodyPr wrap="none">
             <a:spAutoFit/>
           </a:bodyPr>
           <a:lstStyle/>
           <a:p>
             <a:pPr algn="ctr"/>
             <a:r>
-              <a:rPr sz="1150" i="1">
-                <a:solidFill>
-                  <a:srgbClr val="5B626C"/>
-                </a:solidFill>
-                <a:latin typeface="Aptos"/>
-              </a:rPr>
-              <a:t>Managed identity to source and stage  ·  watermark / CDC state persisted  ·  Snowflake is the load target only.</a:t>
+              <a:rPr sz="1000" i="1">
+                <a:solidFill>
+                  <a:srgbClr val="6B7280"/>
+                </a:solidFill>
+                <a:latin typeface="Aptos"/>
+              </a:rPr>
+              <a:t>Integration team</a:t>
+            </a:r>
+          </a:p>
+        </p:txBody>
+      </p:sp>
+      <p:sp>
+        <p:nvSpPr>
+          <p:cNvPr id="17" name="TextBox 16"/>
+          <p:cNvSpPr txBox="1"/>
+          <p:nvPr/>
+        </p:nvSpPr>
+        <p:spPr>
+          <a:xfrm>
+            <a:off x="7306056" y="5504688"/>
+            <a:ext cx="3657600" cy="256032"/>
+          </a:xfrm>
+          <a:prstGeom prst="rect">
+            <a:avLst/>
+          </a:prstGeom>
+          <a:noFill/>
+        </p:spPr>
+        <p:txBody>
+          <a:bodyPr wrap="none">
+            <a:spAutoFit/>
+          </a:bodyPr>
+          <a:lstStyle/>
+          <a:p>
+            <a:pPr algn="ctr"/>
+            <a:r>
+              <a:rPr sz="1000" i="1">
+                <a:solidFill>
+                  <a:srgbClr val="6B7280"/>
+                </a:solidFill>
+                <a:latin typeface="Aptos"/>
+              </a:rPr>
+              <a:t>Data platform team</a:t>
             </a:r>
           </a:p>
         </p:txBody>
@@ -15241,7 +15296,53 @@
       <p:grpSpPr/>
       <p:sp>
         <p:nvSpPr>
-          <p:cNvPr id="2" name="TextBox 1"/>
+          <p:cNvPr id="2" name="Rounded Rectangle 1"/>
+          <p:cNvSpPr/>
+          <p:nvPr/>
+        </p:nvSpPr>
+        <p:spPr>
+          <a:xfrm>
+            <a:off x="411480" y="1188720"/>
+            <a:ext cx="11365992" cy="4800600"/>
+          </a:xfrm>
+          <a:prstGeom prst="roundRect">
+            <a:avLst>
+              <a:gd name="adj" fmla="val 1500"/>
+            </a:avLst>
+          </a:prstGeom>
+          <a:noFill/>
+          <a:ln w="12700">
+            <a:solidFill>
+              <a:srgbClr val="D8DCE2"/>
+            </a:solidFill>
+          </a:ln>
+          <a:effectLst/>
+        </p:spPr>
+        <p:style>
+          <a:lnRef idx="1">
+            <a:schemeClr val="accent1"/>
+          </a:lnRef>
+          <a:fillRef idx="3">
+            <a:schemeClr val="accent1"/>
+          </a:fillRef>
+          <a:effectRef idx="2">
+            <a:schemeClr val="accent1"/>
+          </a:effectRef>
+          <a:fontRef idx="minor">
+            <a:schemeClr val="lt1"/>
+          </a:fontRef>
+        </p:style>
+        <p:txBody>
+          <a:bodyPr rtlCol="0" anchor="ctr"/>
+          <a:lstStyle/>
+          <a:p>
+            <a:pPr algn="ctr"/>
+          </a:p>
+        </p:txBody>
+      </p:sp>
+      <p:sp>
+        <p:nvSpPr>
+          <p:cNvPr id="3" name="TextBox 2"/>
           <p:cNvSpPr txBox="1"/>
           <p:nvPr/>
         </p:nvSpPr>
@@ -15272,7 +15373,7 @@
               <a:t>SFDEINT5</a:t>
             </a:r>
             <a:r>
-              <a:rPr b="0" sz="2000">
+              <a:rPr sz="2000">
                 <a:solidFill>
                   <a:srgbClr val="55606E"/>
                 </a:solidFill>
@@ -15280,52 +15381,6 @@
               </a:rPr>
               <a:t>   Staged multi-source ingestion</a:t>
             </a:r>
-          </a:p>
-        </p:txBody>
-      </p:sp>
-      <p:sp>
-        <p:nvSpPr>
-          <p:cNvPr id="3" name="Rounded Rectangle 2"/>
-          <p:cNvSpPr/>
-          <p:nvPr/>
-        </p:nvSpPr>
-        <p:spPr>
-          <a:xfrm>
-            <a:off x="411480" y="1188720"/>
-            <a:ext cx="11365992" cy="4800600"/>
-          </a:xfrm>
-          <a:prstGeom prst="roundRect">
-            <a:avLst>
-              <a:gd name="adj" fmla="val 2000"/>
-            </a:avLst>
-          </a:prstGeom>
-          <a:noFill/>
-          <a:ln w="12700">
-            <a:solidFill>
-              <a:srgbClr val="D8DCE2"/>
-            </a:solidFill>
-          </a:ln>
-          <a:effectLst/>
-        </p:spPr>
-        <p:style>
-          <a:lnRef idx="1">
-            <a:schemeClr val="accent1"/>
-          </a:lnRef>
-          <a:fillRef idx="3">
-            <a:schemeClr val="accent1"/>
-          </a:fillRef>
-          <a:effectRef idx="2">
-            <a:schemeClr val="accent1"/>
-          </a:effectRef>
-          <a:fontRef idx="minor">
-            <a:schemeClr val="lt1"/>
-          </a:fontRef>
-        </p:style>
-        <p:txBody>
-          <a:bodyPr rtlCol="0" anchor="ctr"/>
-          <a:lstStyle/>
-          <a:p>
-            <a:pPr algn="ctr"/>
           </a:p>
         </p:txBody>
       </p:sp>
@@ -15337,8 +15392,8 @@
         </p:nvSpPr>
         <p:spPr>
           <a:xfrm>
-            <a:off x="1005839" y="3163824"/>
-            <a:ext cx="1669694" cy="896112"/>
+            <a:off x="868680" y="3108960"/>
+            <a:ext cx="1783080" cy="914400"/>
           </a:xfrm>
           <a:prstGeom prst="roundRect">
             <a:avLst>
@@ -15410,8 +15465,8 @@
         </p:nvSpPr>
         <p:spPr>
           <a:xfrm>
-            <a:off x="3132734" y="3163824"/>
-            <a:ext cx="1669694" cy="896112"/>
+            <a:off x="3154680" y="3108960"/>
+            <a:ext cx="1965960" cy="914400"/>
           </a:xfrm>
           <a:prstGeom prst="roundRect">
             <a:avLst>
@@ -15483,8 +15538,8 @@
         </p:nvSpPr>
         <p:spPr>
           <a:xfrm>
-            <a:off x="5259628" y="3163824"/>
-            <a:ext cx="1669694" cy="896112"/>
+            <a:off x="5715000" y="3108960"/>
+            <a:ext cx="1920240" cy="914400"/>
           </a:xfrm>
           <a:prstGeom prst="roundRect">
             <a:avLst>
@@ -15556,8 +15611,8 @@
         </p:nvSpPr>
         <p:spPr>
           <a:xfrm>
-            <a:off x="7386523" y="3163824"/>
-            <a:ext cx="1669694" cy="896112"/>
+            <a:off x="8915400" y="2971800"/>
+            <a:ext cx="2240280" cy="1188720"/>
           </a:xfrm>
           <a:prstGeom prst="roundRect">
             <a:avLst>
@@ -15565,77 +15620,6 @@
             </a:avLst>
           </a:prstGeom>
           <a:solidFill>
-            <a:srgbClr val="D9EFE6"/>
-          </a:solidFill>
-          <a:ln w="19050">
-            <a:solidFill>
-              <a:srgbClr val="2E8B72"/>
-            </a:solidFill>
-          </a:ln>
-          <a:effectLst/>
-        </p:spPr>
-        <p:style>
-          <a:lnRef idx="1">
-            <a:schemeClr val="accent1"/>
-          </a:lnRef>
-          <a:fillRef idx="3">
-            <a:schemeClr val="accent1"/>
-          </a:fillRef>
-          <a:effectRef idx="2">
-            <a:schemeClr val="accent1"/>
-          </a:effectRef>
-          <a:fontRef idx="minor">
-            <a:schemeClr val="lt1"/>
-          </a:fontRef>
-        </p:style>
-        <p:txBody>
-          <a:bodyPr rtlCol="0" anchor="ctr" wrap="square" lIns="38100" rIns="38100" tIns="12700" bIns="12700"/>
-          <a:lstStyle/>
-          <a:p>
-            <a:pPr algn="ctr"/>
-            <a:r>
-              <a:rPr b="1" sz="1250">
-                <a:solidFill>
-                  <a:srgbClr val="1D5B49"/>
-                </a:solidFill>
-                <a:latin typeface="Aptos"/>
-              </a:rPr>
-              <a:t>Snowpipe</a:t>
-            </a:r>
-          </a:p>
-          <a:p>
-            <a:pPr algn="ctr">
-              <a:spcBef>
-                <a:spcPts val="200"/>
-              </a:spcBef>
-            </a:pPr>
-            <a:r>
-              <a:rPr sz="850">
-                <a:solidFill>
-                  <a:srgbClr val="1D5B49"/>
-                </a:solidFill>
-                <a:latin typeface="Aptos"/>
-              </a:rPr>
-              <a:t>auto-ingest</a:t>
-            </a:r>
-          </a:p>
-        </p:txBody>
-      </p:sp>
-      <p:sp>
-        <p:nvSpPr>
-          <p:cNvPr id="8" name="Can 7"/>
-          <p:cNvSpPr/>
-          <p:nvPr/>
-        </p:nvSpPr>
-        <p:spPr>
-          <a:xfrm>
-            <a:off x="9513417" y="3163824"/>
-            <a:ext cx="1669694" cy="896112"/>
-          </a:xfrm>
-          <a:prstGeom prst="can">
-            <a:avLst/>
-          </a:prstGeom>
-          <a:solidFill>
             <a:srgbClr val="E4EEF9"/>
           </a:solidFill>
           <a:ln w="19050">
@@ -15671,27 +15655,48 @@
                 </a:solidFill>
                 <a:latin typeface="Aptos"/>
               </a:rPr>
-              <a:t>Snowflake</a:t>
-            </a:r>
-          </a:p>
-          <a:p>
-            <a:pPr algn="ctr">
-              <a:spcBef>
-                <a:spcPts val="200"/>
-              </a:spcBef>
-            </a:pPr>
-            <a:r>
-              <a:rPr sz="850">
-                <a:solidFill>
-                  <a:srgbClr val="1F3864"/>
-                </a:solidFill>
-                <a:latin typeface="Aptos"/>
-              </a:rPr>
-              <a:t>transform pushdown</a:t>
-            </a:r>
-          </a:p>
-        </p:txBody>
-      </p:sp>
+              <a:t>Data platform</a:t>
+            </a:r>
+          </a:p>
+        </p:txBody>
+      </p:sp>
+      <p:cxnSp>
+        <p:nvCxnSpPr>
+          <p:cNvPr id="8" name="Connector 7"/>
+          <p:cNvCxnSpPr/>
+          <p:nvPr/>
+        </p:nvCxnSpPr>
+        <p:spPr>
+          <a:xfrm>
+            <a:off x="2651760" y="3566160"/>
+            <a:ext cx="502920" cy="0"/>
+          </a:xfrm>
+          <a:prstGeom prst="line">
+            <a:avLst/>
+          </a:prstGeom>
+          <a:ln w="22225">
+            <a:solidFill>
+              <a:srgbClr val="5A6472"/>
+            </a:solidFill>
+            <a:tailEnd type="triangle" w="med" len="med"/>
+          </a:ln>
+          <a:effectLst/>
+        </p:spPr>
+        <p:style>
+          <a:lnRef idx="2">
+            <a:schemeClr val="accent1"/>
+          </a:lnRef>
+          <a:fillRef idx="0">
+            <a:schemeClr val="accent1"/>
+          </a:fillRef>
+          <a:effectRef idx="1">
+            <a:schemeClr val="accent1"/>
+          </a:effectRef>
+          <a:fontRef idx="minor">
+            <a:schemeClr val="tx1"/>
+          </a:fontRef>
+        </p:style>
+      </p:cxnSp>
       <p:cxnSp>
         <p:nvCxnSpPr>
           <p:cNvPr id="9" name="Connector 8"/>
@@ -15700,8 +15705,8 @@
         </p:nvCxnSpPr>
         <p:spPr>
           <a:xfrm>
-            <a:off x="2675534" y="3611880"/>
-            <a:ext cx="457200" cy="0"/>
+            <a:off x="5120640" y="3566160"/>
+            <a:ext cx="594360" cy="0"/>
           </a:xfrm>
           <a:prstGeom prst="line">
             <a:avLst/>
@@ -15729,43 +15734,41 @@
           </a:fontRef>
         </p:style>
       </p:cxnSp>
-      <p:cxnSp>
-        <p:nvCxnSpPr>
-          <p:cNvPr id="10" name="Connector 9"/>
-          <p:cNvCxnSpPr/>
-          <p:nvPr/>
-        </p:nvCxnSpPr>
-        <p:spPr>
-          <a:xfrm>
-            <a:off x="4802428" y="3611880"/>
-            <a:ext cx="457200" cy="0"/>
-          </a:xfrm>
-          <a:prstGeom prst="line">
-            <a:avLst/>
-          </a:prstGeom>
-          <a:ln w="22225">
-            <a:solidFill>
-              <a:srgbClr val="5A6472"/>
-            </a:solidFill>
-            <a:tailEnd type="triangle" w="med" len="med"/>
-          </a:ln>
-          <a:effectLst/>
-        </p:spPr>
-        <p:style>
-          <a:lnRef idx="2">
-            <a:schemeClr val="accent1"/>
-          </a:lnRef>
-          <a:fillRef idx="0">
-            <a:schemeClr val="accent1"/>
-          </a:fillRef>
-          <a:effectRef idx="1">
-            <a:schemeClr val="accent1"/>
-          </a:effectRef>
-          <a:fontRef idx="minor">
-            <a:schemeClr val="tx1"/>
-          </a:fontRef>
-        </p:style>
-      </p:cxnSp>
+      <p:sp>
+        <p:nvSpPr>
+          <p:cNvPr id="10" name="TextBox 9"/>
+          <p:cNvSpPr txBox="1"/>
+          <p:nvPr/>
+        </p:nvSpPr>
+        <p:spPr>
+          <a:xfrm>
+            <a:off x="4549140" y="3236976"/>
+            <a:ext cx="1737360" cy="237744"/>
+          </a:xfrm>
+          <a:prstGeom prst="rect">
+            <a:avLst/>
+          </a:prstGeom>
+          <a:noFill/>
+        </p:spPr>
+        <p:txBody>
+          <a:bodyPr wrap="none" lIns="0" rIns="0" tIns="0" bIns="0">
+            <a:spAutoFit/>
+          </a:bodyPr>
+          <a:lstStyle/>
+          <a:p>
+            <a:pPr algn="ctr"/>
+            <a:r>
+              <a:rPr sz="900">
+                <a:solidFill>
+                  <a:srgbClr val="444B55"/>
+                </a:solidFill>
+                <a:latin typeface="Aptos"/>
+              </a:rPr>
+              <a:t>stage</a:t>
+            </a:r>
+          </a:p>
+        </p:txBody>
+      </p:sp>
       <p:cxnSp>
         <p:nvCxnSpPr>
           <p:cNvPr id="11" name="Connector 10"/>
@@ -15774,8 +15777,8 @@
         </p:nvCxnSpPr>
         <p:spPr>
           <a:xfrm>
-            <a:off x="6929323" y="3611880"/>
-            <a:ext cx="457200" cy="0"/>
+            <a:off x="7635240" y="3566160"/>
+            <a:ext cx="1280160" cy="0"/>
           </a:xfrm>
           <a:prstGeom prst="line">
             <a:avLst/>
@@ -15811,8 +15814,8 @@
         </p:nvSpPr>
         <p:spPr>
           <a:xfrm>
-            <a:off x="6334963" y="3282696"/>
-            <a:ext cx="1645920" cy="237744"/>
+            <a:off x="7406640" y="3236976"/>
+            <a:ext cx="1737360" cy="237744"/>
           </a:xfrm>
           <a:prstGeom prst="rect">
             <a:avLst/>
@@ -15846,17 +15849,17 @@
         </p:nvCxnSpPr>
         <p:spPr>
           <a:xfrm>
-            <a:off x="9056217" y="3611880"/>
-            <a:ext cx="457200" cy="0"/>
+            <a:off x="6675120" y="1481328"/>
+            <a:ext cx="0" cy="4279392"/>
           </a:xfrm>
           <a:prstGeom prst="line">
             <a:avLst/>
           </a:prstGeom>
-          <a:ln w="22225">
-            <a:solidFill>
-              <a:srgbClr val="5A6472"/>
-            </a:solidFill>
-            <a:tailEnd type="triangle" w="med" len="med"/>
+          <a:ln w="28575">
+            <a:solidFill>
+              <a:srgbClr val="B0453B"/>
+            </a:solidFill>
+            <a:prstDash val="dash"/>
           </a:ln>
           <a:effectLst/>
         </p:spPr>
@@ -15883,8 +15886,8 @@
         </p:nvSpPr>
         <p:spPr>
           <a:xfrm>
-            <a:off x="640080" y="6053328"/>
-            <a:ext cx="10881360" cy="548640"/>
+            <a:off x="5212079" y="1261872"/>
+            <a:ext cx="2926080" cy="237744"/>
           </a:xfrm>
           <a:prstGeom prst="rect">
             <a:avLst/>
@@ -15892,20 +15895,90 @@
           <a:noFill/>
         </p:spPr>
         <p:txBody>
-          <a:bodyPr wrap="square">
+          <a:bodyPr wrap="none">
             <a:spAutoFit/>
           </a:bodyPr>
           <a:lstStyle/>
           <a:p>
             <a:pPr algn="ctr"/>
             <a:r>
-              <a:rPr sz="1150" i="1">
-                <a:solidFill>
-                  <a:srgbClr val="5B626C"/>
-                </a:solidFill>
-                <a:latin typeface="Aptos"/>
-              </a:rPr>
-              <a:t>Transformation runs inside Snowflake, not in transit.</a:t>
+              <a:rPr sz="950" b="1" i="1">
+                <a:solidFill>
+                  <a:srgbClr val="B0453B"/>
+                </a:solidFill>
+                <a:latin typeface="Aptos"/>
+              </a:rPr>
+              <a:t>Data handoff boundary</a:t>
+            </a:r>
+          </a:p>
+        </p:txBody>
+      </p:sp>
+      <p:sp>
+        <p:nvSpPr>
+          <p:cNvPr id="15" name="TextBox 14"/>
+          <p:cNvSpPr txBox="1"/>
+          <p:nvPr/>
+        </p:nvSpPr>
+        <p:spPr>
+          <a:xfrm>
+            <a:off x="1805940" y="5504688"/>
+            <a:ext cx="3657600" cy="256032"/>
+          </a:xfrm>
+          <a:prstGeom prst="rect">
+            <a:avLst/>
+          </a:prstGeom>
+          <a:noFill/>
+        </p:spPr>
+        <p:txBody>
+          <a:bodyPr wrap="none">
+            <a:spAutoFit/>
+          </a:bodyPr>
+          <a:lstStyle/>
+          <a:p>
+            <a:pPr algn="ctr"/>
+            <a:r>
+              <a:rPr sz="1000" i="1">
+                <a:solidFill>
+                  <a:srgbClr val="6B7280"/>
+                </a:solidFill>
+                <a:latin typeface="Aptos"/>
+              </a:rPr>
+              <a:t>Integration team</a:t>
+            </a:r>
+          </a:p>
+        </p:txBody>
+      </p:sp>
+      <p:sp>
+        <p:nvSpPr>
+          <p:cNvPr id="16" name="TextBox 15"/>
+          <p:cNvSpPr txBox="1"/>
+          <p:nvPr/>
+        </p:nvSpPr>
+        <p:spPr>
+          <a:xfrm>
+            <a:off x="7306056" y="5504688"/>
+            <a:ext cx="3657600" cy="256032"/>
+          </a:xfrm>
+          <a:prstGeom prst="rect">
+            <a:avLst/>
+          </a:prstGeom>
+          <a:noFill/>
+        </p:spPr>
+        <p:txBody>
+          <a:bodyPr wrap="none">
+            <a:spAutoFit/>
+          </a:bodyPr>
+          <a:lstStyle/>
+          <a:p>
+            <a:pPr algn="ctr"/>
+            <a:r>
+              <a:rPr sz="1000" i="1">
+                <a:solidFill>
+                  <a:srgbClr val="6B7280"/>
+                </a:solidFill>
+                <a:latin typeface="Aptos"/>
+              </a:rPr>
+              <a:t>Data platform team</a:t>
             </a:r>
           </a:p>
         </p:txBody>
@@ -15930,7 +16003,53 @@
       <p:grpSpPr/>
       <p:sp>
         <p:nvSpPr>
-          <p:cNvPr id="2" name="TextBox 1"/>
+          <p:cNvPr id="2" name="Rounded Rectangle 1"/>
+          <p:cNvSpPr/>
+          <p:nvPr/>
+        </p:nvSpPr>
+        <p:spPr>
+          <a:xfrm>
+            <a:off x="411480" y="1188720"/>
+            <a:ext cx="11365992" cy="4800600"/>
+          </a:xfrm>
+          <a:prstGeom prst="roundRect">
+            <a:avLst>
+              <a:gd name="adj" fmla="val 1500"/>
+            </a:avLst>
+          </a:prstGeom>
+          <a:noFill/>
+          <a:ln w="12700">
+            <a:solidFill>
+              <a:srgbClr val="D8DCE2"/>
+            </a:solidFill>
+          </a:ln>
+          <a:effectLst/>
+        </p:spPr>
+        <p:style>
+          <a:lnRef idx="1">
+            <a:schemeClr val="accent1"/>
+          </a:lnRef>
+          <a:fillRef idx="3">
+            <a:schemeClr val="accent1"/>
+          </a:fillRef>
+          <a:effectRef idx="2">
+            <a:schemeClr val="accent1"/>
+          </a:effectRef>
+          <a:fontRef idx="minor">
+            <a:schemeClr val="lt1"/>
+          </a:fontRef>
+        </p:style>
+        <p:txBody>
+          <a:bodyPr rtlCol="0" anchor="ctr"/>
+          <a:lstStyle/>
+          <a:p>
+            <a:pPr algn="ctr"/>
+          </a:p>
+        </p:txBody>
+      </p:sp>
+      <p:sp>
+        <p:nvSpPr>
+          <p:cNvPr id="3" name="TextBox 2"/>
           <p:cNvSpPr txBox="1"/>
           <p:nvPr/>
         </p:nvSpPr>
@@ -15961,7 +16080,7 @@
               <a:t>SFDEINT6</a:t>
             </a:r>
             <a:r>
-              <a:rPr b="0" sz="2000">
+              <a:rPr sz="2000">
                 <a:solidFill>
                   <a:srgbClr val="55606E"/>
                 </a:solidFill>
@@ -15969,52 +16088,6 @@
               </a:rPr>
               <a:t>   Governed API import (write)</a:t>
             </a:r>
-          </a:p>
-        </p:txBody>
-      </p:sp>
-      <p:sp>
-        <p:nvSpPr>
-          <p:cNvPr id="3" name="Rounded Rectangle 2"/>
-          <p:cNvSpPr/>
-          <p:nvPr/>
-        </p:nvSpPr>
-        <p:spPr>
-          <a:xfrm>
-            <a:off x="411480" y="1188720"/>
-            <a:ext cx="11365992" cy="4800600"/>
-          </a:xfrm>
-          <a:prstGeom prst="roundRect">
-            <a:avLst>
-              <a:gd name="adj" fmla="val 2000"/>
-            </a:avLst>
-          </a:prstGeom>
-          <a:noFill/>
-          <a:ln w="12700">
-            <a:solidFill>
-              <a:srgbClr val="D8DCE2"/>
-            </a:solidFill>
-          </a:ln>
-          <a:effectLst/>
-        </p:spPr>
-        <p:style>
-          <a:lnRef idx="1">
-            <a:schemeClr val="accent1"/>
-          </a:lnRef>
-          <a:fillRef idx="3">
-            <a:schemeClr val="accent1"/>
-          </a:fillRef>
-          <a:effectRef idx="2">
-            <a:schemeClr val="accent1"/>
-          </a:effectRef>
-          <a:fontRef idx="minor">
-            <a:schemeClr val="lt1"/>
-          </a:fontRef>
-        </p:style>
-        <p:txBody>
-          <a:bodyPr rtlCol="0" anchor="ctr"/>
-          <a:lstStyle/>
-          <a:p>
-            <a:pPr algn="ctr"/>
           </a:p>
         </p:txBody>
       </p:sp>
@@ -16026,8 +16099,8 @@
         </p:nvSpPr>
         <p:spPr>
           <a:xfrm>
-            <a:off x="1612392" y="3163824"/>
-            <a:ext cx="1874519" cy="896112"/>
+            <a:off x="1371600" y="3108960"/>
+            <a:ext cx="2011680" cy="914400"/>
           </a:xfrm>
           <a:prstGeom prst="roundRect">
             <a:avLst>
@@ -16083,8 +16156,8 @@
         </p:nvSpPr>
         <p:spPr>
           <a:xfrm>
-            <a:off x="5157216" y="3163824"/>
-            <a:ext cx="1874519" cy="896112"/>
+            <a:off x="4709160" y="3108960"/>
+            <a:ext cx="2011680" cy="914400"/>
           </a:xfrm>
           <a:prstGeom prst="roundRect">
             <a:avLst>
@@ -16150,17 +16223,19 @@
       </p:sp>
       <p:sp>
         <p:nvSpPr>
-          <p:cNvPr id="6" name="Can 5"/>
+          <p:cNvPr id="6" name="Rounded Rectangle 5"/>
           <p:cNvSpPr/>
           <p:nvPr/>
         </p:nvSpPr>
         <p:spPr>
           <a:xfrm>
-            <a:off x="8702040" y="3163824"/>
-            <a:ext cx="1874519" cy="896112"/>
-          </a:xfrm>
-          <a:prstGeom prst="can">
-            <a:avLst/>
+            <a:off x="8503920" y="2971800"/>
+            <a:ext cx="2286000" cy="1188720"/>
+          </a:xfrm>
+          <a:prstGeom prst="roundRect">
+            <a:avLst>
+              <a:gd name="adj" fmla="val 9000"/>
+            </a:avLst>
           </a:prstGeom>
           <a:solidFill>
             <a:srgbClr val="E4EEF9"/>
@@ -16198,7 +16273,7 @@
                 </a:solidFill>
                 <a:latin typeface="Aptos"/>
               </a:rPr>
-              <a:t>Snowflake</a:t>
+              <a:t>Data platform</a:t>
             </a:r>
           </a:p>
           <a:p>
@@ -16227,8 +16302,8 @@
         </p:nvCxnSpPr>
         <p:spPr>
           <a:xfrm>
-            <a:off x="3486912" y="3483864"/>
-            <a:ext cx="1670304" cy="0"/>
+            <a:off x="3383280" y="3566160"/>
+            <a:ext cx="1325880" cy="0"/>
           </a:xfrm>
           <a:prstGeom prst="line">
             <a:avLst/>
@@ -16264,8 +16339,8 @@
         </p:nvSpPr>
         <p:spPr>
           <a:xfrm>
-            <a:off x="3499104" y="3172968"/>
-            <a:ext cx="1645920" cy="237744"/>
+            <a:off x="3177540" y="3236976"/>
+            <a:ext cx="1737360" cy="237744"/>
           </a:xfrm>
           <a:prstGeom prst="rect">
             <a:avLst/>
@@ -16298,16 +16373,16 @@
           <p:nvPr/>
         </p:nvCxnSpPr>
         <p:spPr>
-          <a:xfrm flipH="1">
-            <a:off x="3486912" y="3758184"/>
-            <a:ext cx="1670304" cy="0"/>
+          <a:xfrm>
+            <a:off x="6720840" y="3566160"/>
+            <a:ext cx="1783080" cy="0"/>
           </a:xfrm>
           <a:prstGeom prst="line">
             <a:avLst/>
           </a:prstGeom>
           <a:ln w="22225">
             <a:solidFill>
-              <a:srgbClr val="2E7D57"/>
+              <a:srgbClr val="5A6472"/>
             </a:solidFill>
             <a:tailEnd type="triangle" w="med" len="med"/>
           </a:ln>
@@ -16336,8 +16411,8 @@
         </p:nvSpPr>
         <p:spPr>
           <a:xfrm>
-            <a:off x="3499104" y="3831336"/>
-            <a:ext cx="1645920" cy="237744"/>
+            <a:off x="6743700" y="3236976"/>
+            <a:ext cx="1737360" cy="237744"/>
           </a:xfrm>
           <a:prstGeom prst="rect">
             <a:avLst/>
@@ -16354,11 +16429,11 @@
             <a:r>
               <a:rPr sz="900">
                 <a:solidFill>
-                  <a:srgbClr val="2E7D57"/>
-                </a:solidFill>
-                <a:latin typeface="Aptos"/>
-              </a:rPr>
-              <a:t>response</a:t>
+                  <a:srgbClr val="444B55"/>
+                </a:solidFill>
+                <a:latin typeface="Aptos"/>
+              </a:rPr>
+              <a:t>land</a:t>
             </a:r>
           </a:p>
         </p:txBody>
@@ -16371,17 +16446,17 @@
         </p:nvCxnSpPr>
         <p:spPr>
           <a:xfrm>
-            <a:off x="7031736" y="3483864"/>
-            <a:ext cx="1670304" cy="0"/>
+            <a:off x="7360920" y="1481328"/>
+            <a:ext cx="0" cy="4279392"/>
           </a:xfrm>
           <a:prstGeom prst="line">
             <a:avLst/>
           </a:prstGeom>
-          <a:ln w="22225">
-            <a:solidFill>
-              <a:srgbClr val="5A6472"/>
-            </a:solidFill>
-            <a:tailEnd type="triangle" w="med" len="med"/>
+          <a:ln w="28575">
+            <a:solidFill>
+              <a:srgbClr val="B0453B"/>
+            </a:solidFill>
+            <a:prstDash val="dash"/>
           </a:ln>
           <a:effectLst/>
         </p:spPr>
@@ -16408,8 +16483,8 @@
         </p:nvSpPr>
         <p:spPr>
           <a:xfrm>
-            <a:off x="7043928" y="3172968"/>
-            <a:ext cx="1645920" cy="237744"/>
+            <a:off x="5897880" y="1261872"/>
+            <a:ext cx="2926080" cy="237744"/>
           </a:xfrm>
           <a:prstGeom prst="rect">
             <a:avLst/>
@@ -16417,61 +16492,94 @@
           <a:noFill/>
         </p:spPr>
         <p:txBody>
-          <a:bodyPr wrap="none" lIns="0" rIns="0" tIns="0" bIns="0">
+          <a:bodyPr wrap="none">
             <a:spAutoFit/>
           </a:bodyPr>
           <a:lstStyle/>
           <a:p>
             <a:pPr algn="ctr"/>
             <a:r>
-              <a:rPr sz="900">
-                <a:solidFill>
-                  <a:srgbClr val="444B55"/>
-                </a:solidFill>
-                <a:latin typeface="Aptos"/>
-              </a:rPr>
-              <a:t>land</a:t>
-            </a:r>
-          </a:p>
-        </p:txBody>
-      </p:sp>
-      <p:cxnSp>
-        <p:nvCxnSpPr>
-          <p:cNvPr id="13" name="Connector 12"/>
-          <p:cNvCxnSpPr/>
-          <p:nvPr/>
-        </p:nvCxnSpPr>
-        <p:spPr>
-          <a:xfrm flipH="1">
-            <a:off x="7031736" y="3758184"/>
-            <a:ext cx="1670304" cy="0"/>
-          </a:xfrm>
-          <a:prstGeom prst="line">
-            <a:avLst/>
-          </a:prstGeom>
-          <a:ln w="22225">
-            <a:solidFill>
-              <a:srgbClr val="2E7D57"/>
-            </a:solidFill>
-            <a:tailEnd type="triangle" w="med" len="med"/>
-          </a:ln>
-          <a:effectLst/>
-        </p:spPr>
-        <p:style>
-          <a:lnRef idx="2">
-            <a:schemeClr val="accent1"/>
-          </a:lnRef>
-          <a:fillRef idx="0">
-            <a:schemeClr val="accent1"/>
-          </a:fillRef>
-          <a:effectRef idx="1">
-            <a:schemeClr val="accent1"/>
-          </a:effectRef>
-          <a:fontRef idx="minor">
-            <a:schemeClr val="tx1"/>
-          </a:fontRef>
-        </p:style>
-      </p:cxnSp>
+              <a:rPr sz="950" b="1" i="1">
+                <a:solidFill>
+                  <a:srgbClr val="B0453B"/>
+                </a:solidFill>
+                <a:latin typeface="Aptos"/>
+              </a:rPr>
+              <a:t>Data handoff boundary</a:t>
+            </a:r>
+          </a:p>
+        </p:txBody>
+      </p:sp>
+      <p:sp>
+        <p:nvSpPr>
+          <p:cNvPr id="13" name="TextBox 12"/>
+          <p:cNvSpPr txBox="1"/>
+          <p:nvPr/>
+        </p:nvSpPr>
+        <p:spPr>
+          <a:xfrm>
+            <a:off x="2148840" y="5504688"/>
+            <a:ext cx="3657600" cy="256032"/>
+          </a:xfrm>
+          <a:prstGeom prst="rect">
+            <a:avLst/>
+          </a:prstGeom>
+          <a:noFill/>
+        </p:spPr>
+        <p:txBody>
+          <a:bodyPr wrap="none">
+            <a:spAutoFit/>
+          </a:bodyPr>
+          <a:lstStyle/>
+          <a:p>
+            <a:pPr algn="ctr"/>
+            <a:r>
+              <a:rPr sz="1000" i="1">
+                <a:solidFill>
+                  <a:srgbClr val="6B7280"/>
+                </a:solidFill>
+                <a:latin typeface="Aptos"/>
+              </a:rPr>
+              <a:t>Integration team</a:t>
+            </a:r>
+          </a:p>
+        </p:txBody>
+      </p:sp>
+      <p:sp>
+        <p:nvSpPr>
+          <p:cNvPr id="14" name="TextBox 13"/>
+          <p:cNvSpPr txBox="1"/>
+          <p:nvPr/>
+        </p:nvSpPr>
+        <p:spPr>
+          <a:xfrm>
+            <a:off x="7648956" y="5504688"/>
+            <a:ext cx="3657600" cy="256032"/>
+          </a:xfrm>
+          <a:prstGeom prst="rect">
+            <a:avLst/>
+          </a:prstGeom>
+          <a:noFill/>
+        </p:spPr>
+        <p:txBody>
+          <a:bodyPr wrap="none">
+            <a:spAutoFit/>
+          </a:bodyPr>
+          <a:lstStyle/>
+          <a:p>
+            <a:pPr algn="ctr"/>
+            <a:r>
+              <a:rPr sz="1000" i="1">
+                <a:solidFill>
+                  <a:srgbClr val="6B7280"/>
+                </a:solidFill>
+                <a:latin typeface="Aptos"/>
+              </a:rPr>
+              <a:t>Data platform team</a:t>
+            </a:r>
+          </a:p>
+        </p:txBody>
+      </p:sp>
     </p:spTree>
   </p:cSld>
   <p:clrMapOvr>
@@ -18104,7 +18212,53 @@
       <p:grpSpPr/>
       <p:sp>
         <p:nvSpPr>
-          <p:cNvPr id="2" name="TextBox 1"/>
+          <p:cNvPr id="2" name="Rounded Rectangle 1"/>
+          <p:cNvSpPr/>
+          <p:nvPr/>
+        </p:nvSpPr>
+        <p:spPr>
+          <a:xfrm>
+            <a:off x="411480" y="1188720"/>
+            <a:ext cx="11365992" cy="4800600"/>
+          </a:xfrm>
+          <a:prstGeom prst="roundRect">
+            <a:avLst>
+              <a:gd name="adj" fmla="val 1500"/>
+            </a:avLst>
+          </a:prstGeom>
+          <a:noFill/>
+          <a:ln w="12700">
+            <a:solidFill>
+              <a:srgbClr val="D8DCE2"/>
+            </a:solidFill>
+          </a:ln>
+          <a:effectLst/>
+        </p:spPr>
+        <p:style>
+          <a:lnRef idx="1">
+            <a:schemeClr val="accent1"/>
+          </a:lnRef>
+          <a:fillRef idx="3">
+            <a:schemeClr val="accent1"/>
+          </a:fillRef>
+          <a:effectRef idx="2">
+            <a:schemeClr val="accent1"/>
+          </a:effectRef>
+          <a:fontRef idx="minor">
+            <a:schemeClr val="lt1"/>
+          </a:fontRef>
+        </p:style>
+        <p:txBody>
+          <a:bodyPr rtlCol="0" anchor="ctr"/>
+          <a:lstStyle/>
+          <a:p>
+            <a:pPr algn="ctr"/>
+          </a:p>
+        </p:txBody>
+      </p:sp>
+      <p:sp>
+        <p:nvSpPr>
+          <p:cNvPr id="3" name="TextBox 2"/>
           <p:cNvSpPr txBox="1"/>
           <p:nvPr/>
         </p:nvSpPr>
@@ -18135,7 +18289,7 @@
               <a:t>SFDEINT8</a:t>
             </a:r>
             <a:r>
-              <a:rPr b="0" sz="2000">
+              <a:rPr sz="2000">
                 <a:solidFill>
                   <a:srgbClr val="55606E"/>
                 </a:solidFill>
@@ -18148,63 +18302,19 @@
       </p:sp>
       <p:sp>
         <p:nvSpPr>
-          <p:cNvPr id="3" name="Rounded Rectangle 2"/>
+          <p:cNvPr id="4" name="Rounded Rectangle 3"/>
           <p:cNvSpPr/>
           <p:nvPr/>
         </p:nvSpPr>
         <p:spPr>
           <a:xfrm>
-            <a:off x="411480" y="1188720"/>
-            <a:ext cx="11365992" cy="4800600"/>
+            <a:off x="868680" y="2971800"/>
+            <a:ext cx="2194560" cy="1188720"/>
           </a:xfrm>
           <a:prstGeom prst="roundRect">
             <a:avLst>
-              <a:gd name="adj" fmla="val 2000"/>
+              <a:gd name="adj" fmla="val 9000"/>
             </a:avLst>
-          </a:prstGeom>
-          <a:noFill/>
-          <a:ln w="12700">
-            <a:solidFill>
-              <a:srgbClr val="D8DCE2"/>
-            </a:solidFill>
-          </a:ln>
-          <a:effectLst/>
-        </p:spPr>
-        <p:style>
-          <a:lnRef idx="1">
-            <a:schemeClr val="accent1"/>
-          </a:lnRef>
-          <a:fillRef idx="3">
-            <a:schemeClr val="accent1"/>
-          </a:fillRef>
-          <a:effectRef idx="2">
-            <a:schemeClr val="accent1"/>
-          </a:effectRef>
-          <a:fontRef idx="minor">
-            <a:schemeClr val="lt1"/>
-          </a:fontRef>
-        </p:style>
-        <p:txBody>
-          <a:bodyPr rtlCol="0" anchor="ctr"/>
-          <a:lstStyle/>
-          <a:p>
-            <a:pPr algn="ctr"/>
-          </a:p>
-        </p:txBody>
-      </p:sp>
-      <p:sp>
-        <p:nvSpPr>
-          <p:cNvPr id="4" name="Can 3"/>
-          <p:cNvSpPr/>
-          <p:nvPr/>
-        </p:nvSpPr>
-        <p:spPr>
-          <a:xfrm>
-            <a:off x="1169289" y="3163824"/>
-            <a:ext cx="1874519" cy="896112"/>
-          </a:xfrm>
-          <a:prstGeom prst="can">
-            <a:avLst/>
           </a:prstGeom>
           <a:solidFill>
             <a:srgbClr val="E4EEF9"/>
@@ -18242,7 +18352,7 @@
                 </a:solidFill>
                 <a:latin typeface="Aptos"/>
               </a:rPr>
-              <a:t>Snowflake</a:t>
+              <a:t>Data platform</a:t>
             </a:r>
           </a:p>
           <a:p>
@@ -18271,8 +18381,8 @@
         </p:nvSpPr>
         <p:spPr>
           <a:xfrm>
-            <a:off x="3827906" y="3163824"/>
-            <a:ext cx="1874519" cy="896112"/>
+            <a:off x="4023360" y="3108960"/>
+            <a:ext cx="1920240" cy="914400"/>
           </a:xfrm>
           <a:prstGeom prst="roundRect">
             <a:avLst>
@@ -18344,8 +18454,8 @@
         </p:nvSpPr>
         <p:spPr>
           <a:xfrm>
-            <a:off x="6486525" y="3163824"/>
-            <a:ext cx="1874519" cy="896112"/>
+            <a:off x="6675120" y="3108960"/>
+            <a:ext cx="2011680" cy="914400"/>
           </a:xfrm>
           <a:prstGeom prst="roundRect">
             <a:avLst>
@@ -18417,8 +18527,8 @@
         </p:nvSpPr>
         <p:spPr>
           <a:xfrm>
-            <a:off x="9145143" y="3163824"/>
-            <a:ext cx="1874519" cy="896112"/>
+            <a:off x="9418320" y="3108960"/>
+            <a:ext cx="2011680" cy="914400"/>
           </a:xfrm>
           <a:prstGeom prst="roundRect">
             <a:avLst>
@@ -18490,8 +18600,8 @@
         </p:nvCxnSpPr>
         <p:spPr>
           <a:xfrm>
-            <a:off x="3043809" y="3611880"/>
-            <a:ext cx="784097" cy="0"/>
+            <a:off x="3063239" y="3566160"/>
+            <a:ext cx="960121" cy="0"/>
           </a:xfrm>
           <a:prstGeom prst="line">
             <a:avLst/>
@@ -18527,8 +18637,8 @@
         </p:nvSpPr>
         <p:spPr>
           <a:xfrm>
-            <a:off x="2612897" y="3282696"/>
-            <a:ext cx="1645920" cy="237744"/>
+            <a:off x="2674620" y="3236976"/>
+            <a:ext cx="1737360" cy="237744"/>
           </a:xfrm>
           <a:prstGeom prst="rect">
             <a:avLst/>
@@ -18562,8 +18672,8 @@
         </p:nvCxnSpPr>
         <p:spPr>
           <a:xfrm>
-            <a:off x="5702426" y="3611880"/>
-            <a:ext cx="784099" cy="0"/>
+            <a:off x="5943600" y="3566160"/>
+            <a:ext cx="731520" cy="0"/>
           </a:xfrm>
           <a:prstGeom prst="line">
             <a:avLst/>
@@ -18599,8 +18709,8 @@
         </p:nvSpPr>
         <p:spPr>
           <a:xfrm>
-            <a:off x="5271515" y="3282696"/>
-            <a:ext cx="1645920" cy="237744"/>
+            <a:off x="5440680" y="3236976"/>
+            <a:ext cx="1737360" cy="237744"/>
           </a:xfrm>
           <a:prstGeom prst="rect">
             <a:avLst/>
@@ -18634,8 +18744,8 @@
         </p:nvCxnSpPr>
         <p:spPr>
           <a:xfrm>
-            <a:off x="8361045" y="3611880"/>
-            <a:ext cx="784098" cy="0"/>
+            <a:off x="8686800" y="3566160"/>
+            <a:ext cx="731520" cy="0"/>
           </a:xfrm>
           <a:prstGeom prst="line">
             <a:avLst/>
@@ -18671,8 +18781,8 @@
         </p:nvSpPr>
         <p:spPr>
           <a:xfrm>
-            <a:off x="7930134" y="3282696"/>
-            <a:ext cx="1645920" cy="237744"/>
+            <a:off x="8183880" y="3236976"/>
+            <a:ext cx="1737360" cy="237744"/>
           </a:xfrm>
           <a:prstGeom prst="rect">
             <a:avLst/>
@@ -18706,8 +18816,8 @@
         </p:nvCxnSpPr>
         <p:spPr>
           <a:xfrm flipV="1">
-            <a:off x="10082403" y="2706624"/>
-            <a:ext cx="0" cy="457200"/>
+            <a:off x="10424160" y="2606039"/>
+            <a:ext cx="0" cy="502921"/>
           </a:xfrm>
           <a:prstGeom prst="line">
             <a:avLst/>
@@ -18743,8 +18853,8 @@
         </p:nvCxnSpPr>
         <p:spPr>
           <a:xfrm flipH="1">
-            <a:off x="4765167" y="2706624"/>
-            <a:ext cx="5317236" cy="0"/>
+            <a:off x="4983480" y="2606039"/>
+            <a:ext cx="5440680" cy="0"/>
           </a:xfrm>
           <a:prstGeom prst="line">
             <a:avLst/>
@@ -18780,8 +18890,8 @@
         </p:nvCxnSpPr>
         <p:spPr>
           <a:xfrm>
-            <a:off x="4765167" y="2706624"/>
-            <a:ext cx="0" cy="457200"/>
+            <a:off x="4983480" y="2606039"/>
+            <a:ext cx="0" cy="502921"/>
           </a:xfrm>
           <a:prstGeom prst="line">
             <a:avLst/>
@@ -18818,8 +18928,8 @@
         </p:nvSpPr>
         <p:spPr>
           <a:xfrm>
-            <a:off x="6052185" y="2487168"/>
-            <a:ext cx="2743200" cy="219456"/>
+            <a:off x="6606540" y="2350007"/>
+            <a:ext cx="2194560" cy="219456"/>
           </a:xfrm>
           <a:prstGeom prst="rect">
             <a:avLst/>
@@ -18827,7 +18937,7 @@
           <a:noFill/>
         </p:spPr>
         <p:txBody>
-          <a:bodyPr wrap="none" lIns="0" rIns="0" tIns="0" bIns="0">
+          <a:bodyPr wrap="none">
             <a:spAutoFit/>
           </a:bodyPr>
           <a:lstStyle/>
@@ -18845,16 +18955,53 @@
           </a:p>
         </p:txBody>
       </p:sp>
-      <p:sp>
-        <p:nvSpPr>
-          <p:cNvPr id="18" name="TextBox 17"/>
+      <p:cxnSp>
+        <p:nvCxnSpPr>
+          <p:cNvPr id="18" name="Connector 17"/>
+          <p:cNvCxnSpPr/>
+          <p:nvPr/>
+        </p:nvCxnSpPr>
+        <p:spPr>
+          <a:xfrm>
+            <a:off x="4983480" y="1481328"/>
+            <a:ext cx="0" cy="4279392"/>
+          </a:xfrm>
+          <a:prstGeom prst="line">
+            <a:avLst/>
+          </a:prstGeom>
+          <a:ln w="28575">
+            <a:solidFill>
+              <a:srgbClr val="B0453B"/>
+            </a:solidFill>
+            <a:prstDash val="dash"/>
+          </a:ln>
+          <a:effectLst/>
+        </p:spPr>
+        <p:style>
+          <a:lnRef idx="2">
+            <a:schemeClr val="accent1"/>
+          </a:lnRef>
+          <a:fillRef idx="0">
+            <a:schemeClr val="accent1"/>
+          </a:fillRef>
+          <a:effectRef idx="1">
+            <a:schemeClr val="accent1"/>
+          </a:effectRef>
+          <a:fontRef idx="minor">
+            <a:schemeClr val="tx1"/>
+          </a:fontRef>
+        </p:style>
+      </p:cxnSp>
+      <p:sp>
+        <p:nvSpPr>
+          <p:cNvPr id="19" name="TextBox 18"/>
           <p:cNvSpPr txBox="1"/>
           <p:nvPr/>
         </p:nvSpPr>
         <p:spPr>
           <a:xfrm>
-            <a:off x="640080" y="6053328"/>
-            <a:ext cx="10881360" cy="548640"/>
+            <a:off x="3520440" y="1261872"/>
+            <a:ext cx="2926080" cy="237744"/>
           </a:xfrm>
           <a:prstGeom prst="rect">
             <a:avLst/>
@@ -18862,20 +19009,90 @@
           <a:noFill/>
         </p:spPr>
         <p:txBody>
-          <a:bodyPr wrap="square">
+          <a:bodyPr wrap="none">
             <a:spAutoFit/>
           </a:bodyPr>
           <a:lstStyle/>
           <a:p>
             <a:pPr algn="ctr"/>
             <a:r>
-              <a:rPr sz="1150" i="1">
-                <a:solidFill>
-                  <a:srgbClr val="5B626C"/>
-                </a:solidFill>
-                <a:latin typeface="Aptos"/>
-              </a:rPr>
-              <a:t>Blob / ADLS is the hand-off  ·  analytical and eventually-consistent  ·  the warehouse never writes into a live operational system.</a:t>
+              <a:rPr sz="950" b="1" i="1">
+                <a:solidFill>
+                  <a:srgbClr val="B0453B"/>
+                </a:solidFill>
+                <a:latin typeface="Aptos"/>
+              </a:rPr>
+              <a:t>Data handoff boundary</a:t>
+            </a:r>
+          </a:p>
+        </p:txBody>
+      </p:sp>
+      <p:sp>
+        <p:nvSpPr>
+          <p:cNvPr id="20" name="TextBox 19"/>
+          <p:cNvSpPr txBox="1"/>
+          <p:nvPr/>
+        </p:nvSpPr>
+        <p:spPr>
+          <a:xfrm>
+            <a:off x="960120" y="5504688"/>
+            <a:ext cx="3657600" cy="256032"/>
+          </a:xfrm>
+          <a:prstGeom prst="rect">
+            <a:avLst/>
+          </a:prstGeom>
+          <a:noFill/>
+        </p:spPr>
+        <p:txBody>
+          <a:bodyPr wrap="none">
+            <a:spAutoFit/>
+          </a:bodyPr>
+          <a:lstStyle/>
+          <a:p>
+            <a:pPr algn="ctr"/>
+            <a:r>
+              <a:rPr sz="1000" i="1">
+                <a:solidFill>
+                  <a:srgbClr val="6B7280"/>
+                </a:solidFill>
+                <a:latin typeface="Aptos"/>
+              </a:rPr>
+              <a:t>Data platform team</a:t>
+            </a:r>
+          </a:p>
+        </p:txBody>
+      </p:sp>
+      <p:sp>
+        <p:nvSpPr>
+          <p:cNvPr id="21" name="TextBox 20"/>
+          <p:cNvSpPr txBox="1"/>
+          <p:nvPr/>
+        </p:nvSpPr>
+        <p:spPr>
+          <a:xfrm>
+            <a:off x="6460236" y="5504688"/>
+            <a:ext cx="3657600" cy="256032"/>
+          </a:xfrm>
+          <a:prstGeom prst="rect">
+            <a:avLst/>
+          </a:prstGeom>
+          <a:noFill/>
+        </p:spPr>
+        <p:txBody>
+          <a:bodyPr wrap="none">
+            <a:spAutoFit/>
+          </a:bodyPr>
+          <a:lstStyle/>
+          <a:p>
+            <a:pPr algn="ctr"/>
+            <a:r>
+              <a:rPr sz="1000" i="1">
+                <a:solidFill>
+                  <a:srgbClr val="6B7280"/>
+                </a:solidFill>
+                <a:latin typeface="Aptos"/>
+              </a:rPr>
+              <a:t>Integration team</a:t>
             </a:r>
           </a:p>
         </p:txBody>
